--- a/docs/PolyVote_Review3_Final.pptx
+++ b/docs/PolyVote_Review3_Final.pptx
@@ -4337,7 +4337,7 @@
           <a:lstStyle/>
           <a:p>
             <a:r>
-              <a:t>These are the venues we found that are still accepting papers today, sorted by the student author fee. The cheapest are Indian conferences at about eight to nine thousand rupees: Confluence at Amity Noida, closing the fourth of December; INDIACom in New Delhi, closing the seventh of December, with a six page limit; IEM-ICDC in Kolkata; ICRCICN at Kalyani; and ICESICSC at KIIT Bhubaneswar, which closes on the thirtieth of October. i-PACT is at VIT Vellore in September 2027 for twelve thousand rupees. The international ones cost fifty to seventy-five thousand rupees before travel. The important caveat is the last column: none of these venues has confirmed indexing yet. Every one says submitted for, proposed, or approval awaited, so they are plans, not results, and indexing should be checked on the publisher's site before paying. Fees are normally paid after acceptance, and are approximate in rupees.</a:t>
+              <a:t>We narrowed the list to conferences held in India and hosted by an institution in the NIRF top one hundred, using the 2025 India Rankings, which are the latest published; a 2026 edition has not been released, so ranks could change. The cheapest is SCES at Motilal Nehru National Institute in Prayagraj, about five thousand nine hundred rupees. SANKALP at the IIIT in Gwalior costs seven thousand and shows an IEEE record number. ICESICSC at KIIT closes on the thirtieth of October. Confluence at Amity Noida is nine thousand four hundred and forty with tax and also shows an IEEE record number. INDIACom and ICICC are borderline, because only the parent university is ranked, not the institute or college that hosts. i-PACT is on our own campus at VIT. Indexing: a record number on an official page is not confirmation of IEEE Xplore, and every other venue only claims it. We dropped ICRCICN, IEM-ICDC, iConCISE and ICPCSN because their hosts are not in the top one hundred.</a:t>
             </a:r>
           </a:p>
         </p:txBody>
@@ -4407,7 +4407,7 @@
           <a:lstStyle/>
           <a:p>
             <a:r>
-              <a:t>The recommended order, remembering that we cannot submit to two venues at the same time. ICISSP closes on the twenty-ninth of October, so it is first if we can adapt the paper to their template in time; the decision arrives on the fourth of December. If that fails, INDIACom or Confluence are the cheap Indian options; pick one, not both. Confluence gives the fastest answer, by the twenty-fifth of December, but the deadline is the same day as the ICISSP decision. Then ICEIS, IFIP SEC or ICDF2C as better-quality fallbacks, ISDFS in January with online presentation, and ICEDEG or DATA in the spring. Before submitting: verify the publisher on its own page, remove author names for double-blind venues, follow each venue's AI-disclosure policy, and recheck the deadline, because dates move.</a:t>
+              <a:t>The team asked whether we get the money back. We searched for it and the honest answer is that nothing public says so. VIT's published Research Promotion Policy, approved in April 2019, supports conference registration only for faculty, up to twenty thousand rupees a year within India. The student schemes it lists, the Raman Research Award and the TRA fellowships, are for journal incentives and research fellowships, not conference fees. VIT's own conference pages list normal student fees with no waiver. None of the conferences on the previous slide publishes a student waiver, and Confluence, INDIACom and ICICC state fees are non-refundable. So we will not promise reimbursement. Before paying, ask the School Dean or Programme Chair, the Office of Academic Research and the student welfare office, get the answer in writing, and ask whether VIT credit requires IEEE Xplore indexing. The policy we read is from 2019, so a newer scheme may exist.</a:t>
             </a:r>
           </a:p>
         </p:txBody>
@@ -4477,7 +4477,7 @@
           <a:lstStyle/>
           <a:p>
             <a:r>
-              <a:t>We also checked the list your roommates found. The venues are real. ICRTAC is run by VIT Chennai SCOPE and its ninth edition is on the tenth and eleventh of December, but its paper deadline passed in August. ICSCAN held its seventh edition in June. i-PACT is real but is a power-engineering conference. E-Vote-ID is real and the best topical match. What we could not support is the claim that these are easy or have seventy-five percent acceptance: no venue publishes such a figure, and the numbers we found point the other way, for example ICRTAC 2024 accepted thirty-six of three hundred and fifteen papers, about eleven percent. Also, ICRTAC 2026 says IEEE Xplore, not Springer, and IEEE sponsorship for ICSCAN and ICCCNT is not confirmed on their official sites. A very fast acceptance is a warning sign, so we recommend choosing on fit and verified indexing.</a:t>
+              <a:t>The recommended order within the India and NIRF filter, remembering that we cannot submit to two venues at the same time. SANKALP at the IIIT in Gwalior is first: it shows an IEEE record number, has security and distributed-database tracks, and costs seven thousand rupees. Confluence at Amity Noida is second, also with an IEEE record number. ICESICSC at KIIT closes on the thirtieth of October, so it is only realistic if the paper already fits its template. INDIACom is borderline because only the parent university is ranked. i-PACT is on our own campus but is a power-engineering conference. Before submitting, verify each record number on the IEEE site, recheck deadlines and the NIRF edition, remove author names for double-blind venues, and follow each venue's AI-disclosure policy.</a:t>
             </a:r>
           </a:p>
         </p:txBody>
@@ -41020,7 +41020,7 @@
                 </a:solidFill>
                 <a:latin typeface="Inter"/>
               </a:rPr>
-              <a:t>OPEN FOR SUBMISSION TODAY · BY FEE</a:t>
+              <a:t>INDIA ONLY · NIRF TOP-100 HOSTS · OPEN TODAY</a:t>
             </a:r>
           </a:p>
         </p:txBody>
@@ -41059,7 +41059,7 @@
                 </a:solidFill>
                 <a:latin typeface="Inter"/>
               </a:rPr>
-              <a:t>Venues still accepting papers, cheapest first</a:t>
+              <a:t>India only, NIRF top-100 hosts, cheapest first</a:t>
             </a:r>
           </a:p>
         </p:txBody>
@@ -41112,8 +41112,8 @@
           <p:nvPr/>
         </p:nvGraphicFramePr>
         <p:xfrm>
-          <a:off x="365760" y="1005840"/>
-          <a:ext cx="8412477" cy="3328416"/>
+          <a:off x="365760" y="987552"/>
+          <a:ext cx="8412477" cy="3200400"/>
         </p:xfrm>
         <a:graphic>
           <a:graphicData uri="http://schemas.openxmlformats.org/drawingml/2006/table">
@@ -41122,22 +41122,22 @@
                 <a:tableStyleId>{5C22544A-7EE6-4342-B048-85BDC9FD1C3A}</a:tableStyleId>
               </a:tblPr>
               <a:tblGrid>
-                <a:gridCol w="271370"/>
-                <a:gridCol w="1537765"/>
-                <a:gridCol w="1085481"/>
-                <a:gridCol w="1537765"/>
-                <a:gridCol w="1628221"/>
-                <a:gridCol w="1809135"/>
-                <a:gridCol w="542740"/>
+                <a:gridCol w="268483"/>
+                <a:gridCol w="1297669"/>
+                <a:gridCol w="2550592"/>
+                <a:gridCol w="894944"/>
+                <a:gridCol w="1029186"/>
+                <a:gridCol w="1029186"/>
+                <a:gridCol w="1342417"/>
               </a:tblGrid>
-              <a:tr h="310896">
-                <a:tc>
-                  <a:txBody>
-                    <a:bodyPr wrap="square"/>
-                    <a:lstStyle/>
-                    <a:p>
-                      <a:r>
-                        <a:rPr sz="900" b="1" i="0">
+              <a:tr h="274320">
+                <a:tc>
+                  <a:txBody>
+                    <a:bodyPr wrap="square"/>
+                    <a:lstStyle/>
+                    <a:p>
+                      <a:r>
+                        <a:rPr sz="850" b="1" i="0">
                           <a:solidFill>
                             <a:srgbClr val="FFFFFF"/>
                           </a:solidFill>
@@ -41159,7 +41159,7 @@
                     <a:lstStyle/>
                     <a:p>
                       <a:r>
-                        <a:rPr sz="900" b="1" i="0">
+                        <a:rPr sz="850" b="1" i="0">
                           <a:solidFill>
                             <a:srgbClr val="FFFFFF"/>
                           </a:solidFill>
@@ -41181,12 +41181,34 @@
                     <a:lstStyle/>
                     <a:p>
                       <a:r>
-                        <a:rPr sz="900" b="1" i="0">
+                        <a:rPr sz="850" b="1" i="0">
                           <a:solidFill>
                             <a:srgbClr val="FFFFFF"/>
                           </a:solidFill>
                           <a:latin typeface="Inter"/>
                         </a:rPr>
+                        <a:t>Host university (NIRF 2025 rank)</a:t>
+                      </a:r>
+                    </a:p>
+                  </a:txBody>
+                  <a:tcPr marL="73152" marR="73152" marT="36576" marB="36576" anchor="ctr">
+                    <a:solidFill>
+                      <a:srgbClr val="1B2A55"/>
+                    </a:solidFill>
+                  </a:tcPr>
+                </a:tc>
+                <a:tc>
+                  <a:txBody>
+                    <a:bodyPr wrap="square"/>
+                    <a:lstStyle/>
+                    <a:p>
+                      <a:r>
+                        <a:rPr sz="850" b="1" i="0">
+                          <a:solidFill>
+                            <a:srgbClr val="FFFFFF"/>
+                          </a:solidFill>
+                          <a:latin typeface="Inter"/>
+                        </a:rPr>
                         <a:t>Submit by</a:t>
                       </a:r>
                     </a:p>
@@ -41203,13 +41225,13 @@
                     <a:lstStyle/>
                     <a:p>
                       <a:r>
-                        <a:rPr sz="900" b="1" i="0">
+                        <a:rPr sz="850" b="1" i="0">
                           <a:solidFill>
                             <a:srgbClr val="FFFFFF"/>
                           </a:solidFill>
                           <a:latin typeface="Inter"/>
                         </a:rPr>
-                        <a:t>Student fee</a:t>
+                        <a:t>Student fee, INR</a:t>
                       </a:r>
                     </a:p>
                   </a:txBody>
@@ -41225,13 +41247,13 @@
                     <a:lstStyle/>
                     <a:p>
                       <a:r>
-                        <a:rPr sz="900" b="1" i="0">
+                        <a:rPr sz="850" b="1" i="0">
                           <a:solidFill>
                             <a:srgbClr val="FFFFFF"/>
                           </a:solidFill>
                           <a:latin typeface="Inter"/>
                         </a:rPr>
-                        <a:t>Where</a:t>
+                        <a:t>Held</a:t>
                       </a:r>
                     </a:p>
                   </a:txBody>
@@ -41247,13 +41269,13 @@
                     <a:lstStyle/>
                     <a:p>
                       <a:r>
-                        <a:rPr sz="900" b="1" i="0">
+                        <a:rPr sz="850" b="1" i="0">
                           <a:solidFill>
                             <a:srgbClr val="FFFFFF"/>
                           </a:solidFill>
                           <a:latin typeface="Inter"/>
                         </a:rPr>
-                        <a:t>IEEE/Springer indexing</a:t>
+                        <a:t>Indexing</a:t>
                       </a:r>
                     </a:p>
                   </a:txBody>
@@ -41263,37 +41285,15 @@
                     </a:solidFill>
                   </a:tcPr>
                 </a:tc>
-                <a:tc>
-                  <a:txBody>
-                    <a:bodyPr wrap="square"/>
-                    <a:lstStyle/>
-                    <a:p>
-                      <a:r>
-                        <a:rPr sz="900" b="1" i="0">
-                          <a:solidFill>
-                            <a:srgbClr val="FFFFFF"/>
-                          </a:solidFill>
-                          <a:latin typeface="Inter"/>
-                        </a:rPr>
-                        <a:t>Fit</a:t>
-                      </a:r>
-                    </a:p>
-                  </a:txBody>
-                  <a:tcPr marL="73152" marR="73152" marT="36576" marB="36576" anchor="ctr">
-                    <a:solidFill>
-                      <a:srgbClr val="1B2A55"/>
-                    </a:solidFill>
-                  </a:tcPr>
-                </a:tc>
               </a:tr>
-              <a:tr h="301752">
-                <a:tc>
-                  <a:txBody>
-                    <a:bodyPr wrap="square"/>
-                    <a:lstStyle/>
-                    <a:p>
-                      <a:r>
-                        <a:rPr sz="850" b="1" i="0">
+              <a:tr h="365760">
+                <a:tc>
+                  <a:txBody>
+                    <a:bodyPr wrap="square"/>
+                    <a:lstStyle/>
+                    <a:p>
+                      <a:r>
+                        <a:rPr sz="800" b="1" i="0">
                           <a:solidFill>
                             <a:srgbClr val="1B2A55"/>
                           </a:solidFill>
@@ -41315,12 +41315,636 @@
                     <a:lstStyle/>
                     <a:p>
                       <a:r>
-                        <a:rPr sz="850" b="0" i="0">
+                        <a:rPr sz="800" b="0" i="0">
                           <a:solidFill>
                             <a:srgbClr val="353B4A"/>
                           </a:solidFill>
                           <a:latin typeface="Inter"/>
                         </a:rPr>
+                        <a:t>SCES-2027</a:t>
+                      </a:r>
+                    </a:p>
+                  </a:txBody>
+                  <a:tcPr marL="73152" marR="73152" marT="36576" marB="36576" anchor="ctr">
+                    <a:solidFill>
+                      <a:srgbClr val="FFFFFF"/>
+                    </a:solidFill>
+                  </a:tcPr>
+                </a:tc>
+                <a:tc>
+                  <a:txBody>
+                    <a:bodyPr wrap="square"/>
+                    <a:lstStyle/>
+                    <a:p>
+                      <a:r>
+                        <a:rPr sz="800" b="0" i="0">
+                          <a:solidFill>
+                            <a:srgbClr val="353B4A"/>
+                          </a:solidFill>
+                          <a:latin typeface="Inter"/>
+                        </a:rPr>
+                        <a:t>MNNIT Allahabad, Prayagraj (Engineering 62)</a:t>
+                      </a:r>
+                    </a:p>
+                  </a:txBody>
+                  <a:tcPr marL="73152" marR="73152" marT="36576" marB="36576" anchor="ctr">
+                    <a:solidFill>
+                      <a:srgbClr val="FFFFFF"/>
+                    </a:solidFill>
+                  </a:tcPr>
+                </a:tc>
+                <a:tc>
+                  <a:txBody>
+                    <a:bodyPr wrap="square"/>
+                    <a:lstStyle/>
+                    <a:p>
+                      <a:r>
+                        <a:rPr sz="800" b="0" i="0">
+                          <a:solidFill>
+                            <a:srgbClr val="353B4A"/>
+                          </a:solidFill>
+                          <a:latin typeface="Inter"/>
+                        </a:rPr>
+                        <a:t>15 Nov 2026*</a:t>
+                      </a:r>
+                    </a:p>
+                  </a:txBody>
+                  <a:tcPr marL="73152" marR="73152" marT="36576" marB="36576" anchor="ctr">
+                    <a:solidFill>
+                      <a:srgbClr val="FFFFFF"/>
+                    </a:solidFill>
+                  </a:tcPr>
+                </a:tc>
+                <a:tc>
+                  <a:txBody>
+                    <a:bodyPr wrap="square"/>
+                    <a:lstStyle/>
+                    <a:p>
+                      <a:r>
+                        <a:rPr sz="800" b="0" i="0">
+                          <a:solidFill>
+                            <a:srgbClr val="353B4A"/>
+                          </a:solidFill>
+                          <a:latin typeface="Inter"/>
+                        </a:rPr>
+                        <a:t>5,900 incl. GST</a:t>
+                      </a:r>
+                    </a:p>
+                  </a:txBody>
+                  <a:tcPr marL="73152" marR="73152" marT="36576" marB="36576" anchor="ctr">
+                    <a:solidFill>
+                      <a:srgbClr val="FFFFFF"/>
+                    </a:solidFill>
+                  </a:tcPr>
+                </a:tc>
+                <a:tc>
+                  <a:txBody>
+                    <a:bodyPr wrap="square"/>
+                    <a:lstStyle/>
+                    <a:p>
+                      <a:r>
+                        <a:rPr sz="800" b="0" i="0">
+                          <a:solidFill>
+                            <a:srgbClr val="353B4A"/>
+                          </a:solidFill>
+                          <a:latin typeface="Inter"/>
+                        </a:rPr>
+                        <a:t>12-14 Mar 2027</a:t>
+                      </a:r>
+                    </a:p>
+                  </a:txBody>
+                  <a:tcPr marL="73152" marR="73152" marT="36576" marB="36576" anchor="ctr">
+                    <a:solidFill>
+                      <a:srgbClr val="FFFFFF"/>
+                    </a:solidFill>
+                  </a:tcPr>
+                </a:tc>
+                <a:tc>
+                  <a:txBody>
+                    <a:bodyPr wrap="square"/>
+                    <a:lstStyle/>
+                    <a:p>
+                      <a:r>
+                        <a:rPr sz="800" b="0" i="0">
+                          <a:solidFill>
+                            <a:srgbClr val="353B4A"/>
+                          </a:solidFill>
+                          <a:latin typeface="Inter"/>
+                        </a:rPr>
+                        <a:t>Claimed</a:t>
+                      </a:r>
+                    </a:p>
+                  </a:txBody>
+                  <a:tcPr marL="73152" marR="73152" marT="36576" marB="36576" anchor="ctr">
+                    <a:solidFill>
+                      <a:srgbClr val="FFFFFF"/>
+                    </a:solidFill>
+                  </a:tcPr>
+                </a:tc>
+              </a:tr>
+              <a:tr h="365760">
+                <a:tc>
+                  <a:txBody>
+                    <a:bodyPr wrap="square"/>
+                    <a:lstStyle/>
+                    <a:p>
+                      <a:r>
+                        <a:rPr sz="800" b="1" i="0">
+                          <a:solidFill>
+                            <a:srgbClr val="1B2A55"/>
+                          </a:solidFill>
+                          <a:latin typeface="Inter"/>
+                        </a:rPr>
+                        <a:t>2</a:t>
+                      </a:r>
+                    </a:p>
+                  </a:txBody>
+                  <a:tcPr marL="73152" marR="73152" marT="36576" marB="36576" anchor="ctr">
+                    <a:solidFill>
+                      <a:srgbClr val="F1F0F6"/>
+                    </a:solidFill>
+                  </a:tcPr>
+                </a:tc>
+                <a:tc>
+                  <a:txBody>
+                    <a:bodyPr wrap="square"/>
+                    <a:lstStyle/>
+                    <a:p>
+                      <a:r>
+                        <a:rPr sz="800" b="0" i="0">
+                          <a:solidFill>
+                            <a:srgbClr val="353B4A"/>
+                          </a:solidFill>
+                          <a:latin typeface="Inter"/>
+                        </a:rPr>
+                        <a:t>IEEE COEP CON 2027</a:t>
+                      </a:r>
+                    </a:p>
+                  </a:txBody>
+                  <a:tcPr marL="73152" marR="73152" marT="36576" marB="36576" anchor="ctr">
+                    <a:solidFill>
+                      <a:srgbClr val="F1F0F6"/>
+                    </a:solidFill>
+                  </a:tcPr>
+                </a:tc>
+                <a:tc>
+                  <a:txBody>
+                    <a:bodyPr wrap="square"/>
+                    <a:lstStyle/>
+                    <a:p>
+                      <a:r>
+                        <a:rPr sz="800" b="0" i="0">
+                          <a:solidFill>
+                            <a:srgbClr val="353B4A"/>
+                          </a:solidFill>
+                          <a:latin typeface="Inter"/>
+                        </a:rPr>
+                        <a:t>COEP Technological Univ., Pune (Engineering 90)</a:t>
+                      </a:r>
+                    </a:p>
+                  </a:txBody>
+                  <a:tcPr marL="73152" marR="73152" marT="36576" marB="36576" anchor="ctr">
+                    <a:solidFill>
+                      <a:srgbClr val="F1F0F6"/>
+                    </a:solidFill>
+                  </a:tcPr>
+                </a:tc>
+                <a:tc>
+                  <a:txBody>
+                    <a:bodyPr wrap="square"/>
+                    <a:lstStyle/>
+                    <a:p>
+                      <a:r>
+                        <a:rPr sz="800" b="0" i="0">
+                          <a:solidFill>
+                            <a:srgbClr val="353B4A"/>
+                          </a:solidFill>
+                          <a:latin typeface="Inter"/>
+                        </a:rPr>
+                        <a:t>31 Mar 2027</a:t>
+                      </a:r>
+                    </a:p>
+                  </a:txBody>
+                  <a:tcPr marL="73152" marR="73152" marT="36576" marB="36576" anchor="ctr">
+                    <a:solidFill>
+                      <a:srgbClr val="F1F0F6"/>
+                    </a:solidFill>
+                  </a:tcPr>
+                </a:tc>
+                <a:tc>
+                  <a:txBody>
+                    <a:bodyPr wrap="square"/>
+                    <a:lstStyle/>
+                    <a:p>
+                      <a:r>
+                        <a:rPr sz="800" b="0" i="0">
+                          <a:solidFill>
+                            <a:srgbClr val="353B4A"/>
+                          </a:solidFill>
+                          <a:latin typeface="Inter"/>
+                        </a:rPr>
+                        <a:t>6,000†</a:t>
+                      </a:r>
+                    </a:p>
+                  </a:txBody>
+                  <a:tcPr marL="73152" marR="73152" marT="36576" marB="36576" anchor="ctr">
+                    <a:solidFill>
+                      <a:srgbClr val="F1F0F6"/>
+                    </a:solidFill>
+                  </a:tcPr>
+                </a:tc>
+                <a:tc>
+                  <a:txBody>
+                    <a:bodyPr wrap="square"/>
+                    <a:lstStyle/>
+                    <a:p>
+                      <a:r>
+                        <a:rPr sz="800" b="0" i="0">
+                          <a:solidFill>
+                            <a:srgbClr val="353B4A"/>
+                          </a:solidFill>
+                          <a:latin typeface="Inter"/>
+                        </a:rPr>
+                        <a:t>4-6 Jun 2027</a:t>
+                      </a:r>
+                    </a:p>
+                  </a:txBody>
+                  <a:tcPr marL="73152" marR="73152" marT="36576" marB="36576" anchor="ctr">
+                    <a:solidFill>
+                      <a:srgbClr val="F1F0F6"/>
+                    </a:solidFill>
+                  </a:tcPr>
+                </a:tc>
+                <a:tc>
+                  <a:txBody>
+                    <a:bodyPr wrap="square"/>
+                    <a:lstStyle/>
+                    <a:p>
+                      <a:r>
+                        <a:rPr sz="800" b="0" i="0">
+                          <a:solidFill>
+                            <a:srgbClr val="353B4A"/>
+                          </a:solidFill>
+                          <a:latin typeface="Inter"/>
+                        </a:rPr>
+                        <a:t>Claimed</a:t>
+                      </a:r>
+                    </a:p>
+                  </a:txBody>
+                  <a:tcPr marL="73152" marR="73152" marT="36576" marB="36576" anchor="ctr">
+                    <a:solidFill>
+                      <a:srgbClr val="F1F0F6"/>
+                    </a:solidFill>
+                  </a:tcPr>
+                </a:tc>
+              </a:tr>
+              <a:tr h="365760">
+                <a:tc>
+                  <a:txBody>
+                    <a:bodyPr wrap="square"/>
+                    <a:lstStyle/>
+                    <a:p>
+                      <a:r>
+                        <a:rPr sz="800" b="1" i="0">
+                          <a:solidFill>
+                            <a:srgbClr val="1B2A55"/>
+                          </a:solidFill>
+                          <a:latin typeface="Inter"/>
+                        </a:rPr>
+                        <a:t>3</a:t>
+                      </a:r>
+                    </a:p>
+                  </a:txBody>
+                  <a:tcPr marL="73152" marR="73152" marT="36576" marB="36576" anchor="ctr">
+                    <a:solidFill>
+                      <a:srgbClr val="FFFFFF"/>
+                    </a:solidFill>
+                  </a:tcPr>
+                </a:tc>
+                <a:tc>
+                  <a:txBody>
+                    <a:bodyPr wrap="square"/>
+                    <a:lstStyle/>
+                    <a:p>
+                      <a:r>
+                        <a:rPr sz="800" b="0" i="0">
+                          <a:solidFill>
+                            <a:srgbClr val="353B4A"/>
+                          </a:solidFill>
+                          <a:latin typeface="Inter"/>
+                        </a:rPr>
+                        <a:t>IEEE SANKALP 2027</a:t>
+                      </a:r>
+                    </a:p>
+                  </a:txBody>
+                  <a:tcPr marL="73152" marR="73152" marT="36576" marB="36576" anchor="ctr">
+                    <a:solidFill>
+                      <a:srgbClr val="FFFFFF"/>
+                    </a:solidFill>
+                  </a:tcPr>
+                </a:tc>
+                <a:tc>
+                  <a:txBody>
+                    <a:bodyPr wrap="square"/>
+                    <a:lstStyle/>
+                    <a:p>
+                      <a:r>
+                        <a:rPr sz="800" b="0" i="0">
+                          <a:solidFill>
+                            <a:srgbClr val="353B4A"/>
+                          </a:solidFill>
+                          <a:latin typeface="Inter"/>
+                        </a:rPr>
+                        <a:t>ABV-IIITM, Gwalior (Engineering 96)</a:t>
+                      </a:r>
+                    </a:p>
+                  </a:txBody>
+                  <a:tcPr marL="73152" marR="73152" marT="36576" marB="36576" anchor="ctr">
+                    <a:solidFill>
+                      <a:srgbClr val="FFFFFF"/>
+                    </a:solidFill>
+                  </a:tcPr>
+                </a:tc>
+                <a:tc>
+                  <a:txBody>
+                    <a:bodyPr wrap="square"/>
+                    <a:lstStyle/>
+                    <a:p>
+                      <a:r>
+                        <a:rPr sz="800" b="0" i="0">
+                          <a:solidFill>
+                            <a:srgbClr val="353B4A"/>
+                          </a:solidFill>
+                          <a:latin typeface="Inter"/>
+                        </a:rPr>
+                        <a:t>30 Nov 2026</a:t>
+                      </a:r>
+                    </a:p>
+                  </a:txBody>
+                  <a:tcPr marL="73152" marR="73152" marT="36576" marB="36576" anchor="ctr">
+                    <a:solidFill>
+                      <a:srgbClr val="FFFFFF"/>
+                    </a:solidFill>
+                  </a:tcPr>
+                </a:tc>
+                <a:tc>
+                  <a:txBody>
+                    <a:bodyPr wrap="square"/>
+                    <a:lstStyle/>
+                    <a:p>
+                      <a:r>
+                        <a:rPr sz="800" b="0" i="0">
+                          <a:solidFill>
+                            <a:srgbClr val="353B4A"/>
+                          </a:solidFill>
+                          <a:latin typeface="Inter"/>
+                        </a:rPr>
+                        <a:t>7,000</a:t>
+                      </a:r>
+                    </a:p>
+                  </a:txBody>
+                  <a:tcPr marL="73152" marR="73152" marT="36576" marB="36576" anchor="ctr">
+                    <a:solidFill>
+                      <a:srgbClr val="FFFFFF"/>
+                    </a:solidFill>
+                  </a:tcPr>
+                </a:tc>
+                <a:tc>
+                  <a:txBody>
+                    <a:bodyPr wrap="square"/>
+                    <a:lstStyle/>
+                    <a:p>
+                      <a:r>
+                        <a:rPr sz="800" b="0" i="0">
+                          <a:solidFill>
+                            <a:srgbClr val="353B4A"/>
+                          </a:solidFill>
+                          <a:latin typeface="Inter"/>
+                        </a:rPr>
+                        <a:t>9-11 Apr 2027</a:t>
+                      </a:r>
+                    </a:p>
+                  </a:txBody>
+                  <a:tcPr marL="73152" marR="73152" marT="36576" marB="36576" anchor="ctr">
+                    <a:solidFill>
+                      <a:srgbClr val="FFFFFF"/>
+                    </a:solidFill>
+                  </a:tcPr>
+                </a:tc>
+                <a:tc>
+                  <a:txBody>
+                    <a:bodyPr wrap="square"/>
+                    <a:lstStyle/>
+                    <a:p>
+                      <a:r>
+                        <a:rPr sz="800" b="0" i="0">
+                          <a:solidFill>
+                            <a:srgbClr val="353B4A"/>
+                          </a:solidFill>
+                          <a:latin typeface="Inter"/>
+                        </a:rPr>
+                        <a:t>IEEE record #73342 shown</a:t>
+                      </a:r>
+                    </a:p>
+                  </a:txBody>
+                  <a:tcPr marL="73152" marR="73152" marT="36576" marB="36576" anchor="ctr">
+                    <a:solidFill>
+                      <a:srgbClr val="FFFFFF"/>
+                    </a:solidFill>
+                  </a:tcPr>
+                </a:tc>
+              </a:tr>
+              <a:tr h="365760">
+                <a:tc>
+                  <a:txBody>
+                    <a:bodyPr wrap="square"/>
+                    <a:lstStyle/>
+                    <a:p>
+                      <a:r>
+                        <a:rPr sz="800" b="1" i="0">
+                          <a:solidFill>
+                            <a:srgbClr val="1B2A55"/>
+                          </a:solidFill>
+                          <a:latin typeface="Inter"/>
+                        </a:rPr>
+                        <a:t>4</a:t>
+                      </a:r>
+                    </a:p>
+                  </a:txBody>
+                  <a:tcPr marL="73152" marR="73152" marT="36576" marB="36576" anchor="ctr">
+                    <a:solidFill>
+                      <a:srgbClr val="F1F0F6"/>
+                    </a:solidFill>
+                  </a:tcPr>
+                </a:tc>
+                <a:tc>
+                  <a:txBody>
+                    <a:bodyPr wrap="square"/>
+                    <a:lstStyle/>
+                    <a:p>
+                      <a:r>
+                        <a:rPr sz="800" b="0" i="0">
+                          <a:solidFill>
+                            <a:srgbClr val="353B4A"/>
+                          </a:solidFill>
+                          <a:latin typeface="Inter"/>
+                        </a:rPr>
+                        <a:t>ICESICSC-2027</a:t>
+                      </a:r>
+                    </a:p>
+                  </a:txBody>
+                  <a:tcPr marL="73152" marR="73152" marT="36576" marB="36576" anchor="ctr">
+                    <a:solidFill>
+                      <a:srgbClr val="F1F0F6"/>
+                    </a:solidFill>
+                  </a:tcPr>
+                </a:tc>
+                <a:tc>
+                  <a:txBody>
+                    <a:bodyPr wrap="square"/>
+                    <a:lstStyle/>
+                    <a:p>
+                      <a:r>
+                        <a:rPr sz="800" b="0" i="0">
+                          <a:solidFill>
+                            <a:srgbClr val="353B4A"/>
+                          </a:solidFill>
+                          <a:latin typeface="Inter"/>
+                        </a:rPr>
+                        <a:t>KIIT, Bhubaneswar (Overall 27)</a:t>
+                      </a:r>
+                    </a:p>
+                  </a:txBody>
+                  <a:tcPr marL="73152" marR="73152" marT="36576" marB="36576" anchor="ctr">
+                    <a:solidFill>
+                      <a:srgbClr val="F1F0F6"/>
+                    </a:solidFill>
+                  </a:tcPr>
+                </a:tc>
+                <a:tc>
+                  <a:txBody>
+                    <a:bodyPr wrap="square"/>
+                    <a:lstStyle/>
+                    <a:p>
+                      <a:r>
+                        <a:rPr sz="800" b="0" i="0">
+                          <a:solidFill>
+                            <a:srgbClr val="353B4A"/>
+                          </a:solidFill>
+                          <a:latin typeface="Inter"/>
+                        </a:rPr>
+                        <a:t>30 Oct 2026</a:t>
+                      </a:r>
+                    </a:p>
+                  </a:txBody>
+                  <a:tcPr marL="73152" marR="73152" marT="36576" marB="36576" anchor="ctr">
+                    <a:solidFill>
+                      <a:srgbClr val="F1F0F6"/>
+                    </a:solidFill>
+                  </a:tcPr>
+                </a:tc>
+                <a:tc>
+                  <a:txBody>
+                    <a:bodyPr wrap="square"/>
+                    <a:lstStyle/>
+                    <a:p>
+                      <a:r>
+                        <a:rPr sz="800" b="0" i="0">
+                          <a:solidFill>
+                            <a:srgbClr val="353B4A"/>
+                          </a:solidFill>
+                          <a:latin typeface="Inter"/>
+                        </a:rPr>
+                        <a:t>9,000</a:t>
+                      </a:r>
+                    </a:p>
+                  </a:txBody>
+                  <a:tcPr marL="73152" marR="73152" marT="36576" marB="36576" anchor="ctr">
+                    <a:solidFill>
+                      <a:srgbClr val="F1F0F6"/>
+                    </a:solidFill>
+                  </a:tcPr>
+                </a:tc>
+                <a:tc>
+                  <a:txBody>
+                    <a:bodyPr wrap="square"/>
+                    <a:lstStyle/>
+                    <a:p>
+                      <a:r>
+                        <a:rPr sz="800" b="0" i="0">
+                          <a:solidFill>
+                            <a:srgbClr val="353B4A"/>
+                          </a:solidFill>
+                          <a:latin typeface="Inter"/>
+                        </a:rPr>
+                        <a:t>20-21 Feb 2027</a:t>
+                      </a:r>
+                    </a:p>
+                  </a:txBody>
+                  <a:tcPr marL="73152" marR="73152" marT="36576" marB="36576" anchor="ctr">
+                    <a:solidFill>
+                      <a:srgbClr val="F1F0F6"/>
+                    </a:solidFill>
+                  </a:tcPr>
+                </a:tc>
+                <a:tc>
+                  <a:txBody>
+                    <a:bodyPr wrap="square"/>
+                    <a:lstStyle/>
+                    <a:p>
+                      <a:r>
+                        <a:rPr sz="800" b="0" i="0">
+                          <a:solidFill>
+                            <a:srgbClr val="353B4A"/>
+                          </a:solidFill>
+                          <a:latin typeface="Inter"/>
+                        </a:rPr>
+                        <a:t>Claimed</a:t>
+                      </a:r>
+                    </a:p>
+                  </a:txBody>
+                  <a:tcPr marL="73152" marR="73152" marT="36576" marB="36576" anchor="ctr">
+                    <a:solidFill>
+                      <a:srgbClr val="F1F0F6"/>
+                    </a:solidFill>
+                  </a:tcPr>
+                </a:tc>
+              </a:tr>
+              <a:tr h="365760">
+                <a:tc>
+                  <a:txBody>
+                    <a:bodyPr wrap="square"/>
+                    <a:lstStyle/>
+                    <a:p>
+                      <a:r>
+                        <a:rPr sz="800" b="1" i="0">
+                          <a:solidFill>
+                            <a:srgbClr val="1B2A55"/>
+                          </a:solidFill>
+                          <a:latin typeface="Inter"/>
+                        </a:rPr>
+                        <a:t>5</a:t>
+                      </a:r>
+                    </a:p>
+                  </a:txBody>
+                  <a:tcPr marL="73152" marR="73152" marT="36576" marB="36576" anchor="ctr">
+                    <a:solidFill>
+                      <a:srgbClr val="FFFFFF"/>
+                    </a:solidFill>
+                  </a:tcPr>
+                </a:tc>
+                <a:tc>
+                  <a:txBody>
+                    <a:bodyPr wrap="square"/>
+                    <a:lstStyle/>
+                    <a:p>
+                      <a:r>
+                        <a:rPr sz="800" b="0" i="0">
+                          <a:solidFill>
+                            <a:srgbClr val="353B4A"/>
+                          </a:solidFill>
+                          <a:latin typeface="Inter"/>
+                        </a:rPr>
                         <a:t>Confluence 2027</a:t>
                       </a:r>
                     </a:p>
@@ -41337,12 +41961,34 @@
                     <a:lstStyle/>
                     <a:p>
                       <a:r>
-                        <a:rPr sz="850" b="0" i="0">
+                        <a:rPr sz="800" b="0" i="0">
                           <a:solidFill>
                             <a:srgbClr val="353B4A"/>
                           </a:solidFill>
                           <a:latin typeface="Inter"/>
                         </a:rPr>
+                        <a:t>Amity University, Noida (Overall 37)</a:t>
+                      </a:r>
+                    </a:p>
+                  </a:txBody>
+                  <a:tcPr marL="73152" marR="73152" marT="36576" marB="36576" anchor="ctr">
+                    <a:solidFill>
+                      <a:srgbClr val="FFFFFF"/>
+                    </a:solidFill>
+                  </a:tcPr>
+                </a:tc>
+                <a:tc>
+                  <a:txBody>
+                    <a:bodyPr wrap="square"/>
+                    <a:lstStyle/>
+                    <a:p>
+                      <a:r>
+                        <a:rPr sz="800" b="0" i="0">
+                          <a:solidFill>
+                            <a:srgbClr val="353B4A"/>
+                          </a:solidFill>
+                          <a:latin typeface="Inter"/>
+                        </a:rPr>
                         <a:t>4 Dec 2026</a:t>
                       </a:r>
                     </a:p>
@@ -41359,13 +42005,13 @@
                     <a:lstStyle/>
                     <a:p>
                       <a:r>
-                        <a:rPr sz="850" b="0" i="0">
+                        <a:rPr sz="800" b="0" i="0">
                           <a:solidFill>
                             <a:srgbClr val="353B4A"/>
                           </a:solidFill>
                           <a:latin typeface="Inter"/>
                         </a:rPr>
-                        <a:t>INR 8,000 + GST</a:t>
+                        <a:t>9,440 incl. GST</a:t>
                       </a:r>
                     </a:p>
                   </a:txBody>
@@ -41381,13 +42027,13 @@
                     <a:lstStyle/>
                     <a:p>
                       <a:r>
-                        <a:rPr sz="850" b="0" i="0">
+                        <a:rPr sz="800" b="0" i="0">
                           <a:solidFill>
                             <a:srgbClr val="353B4A"/>
                           </a:solidFill>
                           <a:latin typeface="Inter"/>
                         </a:rPr>
-                        <a:t>Noida, India</a:t>
+                        <a:t>21-22 Jan 2027</a:t>
                       </a:r>
                     </a:p>
                   </a:txBody>
@@ -41403,13 +42049,13 @@
                     <a:lstStyle/>
                     <a:p>
                       <a:r>
-                        <a:rPr sz="850" b="0" i="0">
+                        <a:rPr sz="800" b="0" i="0">
                           <a:solidFill>
                             <a:srgbClr val="353B4A"/>
                           </a:solidFill>
                           <a:latin typeface="Inter"/>
                         </a:rPr>
-                        <a:t>Submitted for IEEE Xplore</a:t>
+                        <a:t>IEEE record #71526 shown</a:t>
                       </a:r>
                     </a:p>
                   </a:txBody>
@@ -41419,19 +42065,177 @@
                     </a:solidFill>
                   </a:tcPr>
                 </a:tc>
-                <a:tc>
-                  <a:txBody>
-                    <a:bodyPr wrap="square"/>
-                    <a:lstStyle/>
-                    <a:p>
-                      <a:r>
-                        <a:rPr sz="850" b="0" i="0">
+              </a:tr>
+              <a:tr h="365760">
+                <a:tc>
+                  <a:txBody>
+                    <a:bodyPr wrap="square"/>
+                    <a:lstStyle/>
+                    <a:p>
+                      <a:r>
+                        <a:rPr sz="800" b="1" i="0">
+                          <a:solidFill>
+                            <a:srgbClr val="1B2A55"/>
+                          </a:solidFill>
+                          <a:latin typeface="Inter"/>
+                        </a:rPr>
+                        <a:t>6</a:t>
+                      </a:r>
+                    </a:p>
+                  </a:txBody>
+                  <a:tcPr marL="73152" marR="73152" marT="36576" marB="36576" anchor="ctr">
+                    <a:solidFill>
+                      <a:srgbClr val="F1F0F6"/>
+                    </a:solidFill>
+                  </a:tcPr>
+                </a:tc>
+                <a:tc>
+                  <a:txBody>
+                    <a:bodyPr wrap="square"/>
+                    <a:lstStyle/>
+                    <a:p>
+                      <a:r>
+                        <a:rPr sz="800" b="0" i="0">
                           <a:solidFill>
                             <a:srgbClr val="353B4A"/>
                           </a:solidFill>
                           <a:latin typeface="Inter"/>
                         </a:rPr>
-                        <a:t>Good</a:t>
+                        <a:t>INDIACom-2027</a:t>
+                      </a:r>
+                    </a:p>
+                  </a:txBody>
+                  <a:tcPr marL="73152" marR="73152" marT="36576" marB="36576" anchor="ctr">
+                    <a:solidFill>
+                      <a:srgbClr val="F1F0F6"/>
+                    </a:solidFill>
+                  </a:tcPr>
+                </a:tc>
+                <a:tc>
+                  <a:txBody>
+                    <a:bodyPr wrap="square"/>
+                    <a:lstStyle/>
+                    <a:p>
+                      <a:r>
+                        <a:rPr sz="800" b="0" i="0">
+                          <a:solidFill>
+                            <a:srgbClr val="353B4A"/>
+                          </a:solidFill>
+                          <a:latin typeface="Inter"/>
+                        </a:rPr>
+                        <a:t>BVICAM, Bharati Vidyapeeth, New Delhi (parent only, University 59)</a:t>
+                      </a:r>
+                    </a:p>
+                  </a:txBody>
+                  <a:tcPr marL="73152" marR="73152" marT="36576" marB="36576" anchor="ctr">
+                    <a:solidFill>
+                      <a:srgbClr val="F1F0F6"/>
+                    </a:solidFill>
+                  </a:tcPr>
+                </a:tc>
+                <a:tc>
+                  <a:txBody>
+                    <a:bodyPr wrap="square"/>
+                    <a:lstStyle/>
+                    <a:p>
+                      <a:r>
+                        <a:rPr sz="800" b="0" i="0">
+                          <a:solidFill>
+                            <a:srgbClr val="353B4A"/>
+                          </a:solidFill>
+                          <a:latin typeface="Inter"/>
+                        </a:rPr>
+                        <a:t>7 Dec 2026</a:t>
+                      </a:r>
+                    </a:p>
+                  </a:txBody>
+                  <a:tcPr marL="73152" marR="73152" marT="36576" marB="36576" anchor="ctr">
+                    <a:solidFill>
+                      <a:srgbClr val="F1F0F6"/>
+                    </a:solidFill>
+                  </a:tcPr>
+                </a:tc>
+                <a:tc>
+                  <a:txBody>
+                    <a:bodyPr wrap="square"/>
+                    <a:lstStyle/>
+                    <a:p>
+                      <a:r>
+                        <a:rPr sz="800" b="0" i="0">
+                          <a:solidFill>
+                            <a:srgbClr val="353B4A"/>
+                          </a:solidFill>
+                          <a:latin typeface="Inter"/>
+                        </a:rPr>
+                        <a:t>9,440 incl. GST</a:t>
+                      </a:r>
+                    </a:p>
+                  </a:txBody>
+                  <a:tcPr marL="73152" marR="73152" marT="36576" marB="36576" anchor="ctr">
+                    <a:solidFill>
+                      <a:srgbClr val="F1F0F6"/>
+                    </a:solidFill>
+                  </a:tcPr>
+                </a:tc>
+                <a:tc>
+                  <a:txBody>
+                    <a:bodyPr wrap="square"/>
+                    <a:lstStyle/>
+                    <a:p>
+                      <a:r>
+                        <a:rPr sz="800" b="0" i="0">
+                          <a:solidFill>
+                            <a:srgbClr val="353B4A"/>
+                          </a:solidFill>
+                          <a:latin typeface="Inter"/>
+                        </a:rPr>
+                        <a:t>7-9 Apr 2027</a:t>
+                      </a:r>
+                    </a:p>
+                  </a:txBody>
+                  <a:tcPr marL="73152" marR="73152" marT="36576" marB="36576" anchor="ctr">
+                    <a:solidFill>
+                      <a:srgbClr val="F1F0F6"/>
+                    </a:solidFill>
+                  </a:tcPr>
+                </a:tc>
+                <a:tc>
+                  <a:txBody>
+                    <a:bodyPr wrap="square"/>
+                    <a:lstStyle/>
+                    <a:p>
+                      <a:r>
+                        <a:rPr sz="800" b="0" i="0">
+                          <a:solidFill>
+                            <a:srgbClr val="353B4A"/>
+                          </a:solidFill>
+                          <a:latin typeface="Inter"/>
+                        </a:rPr>
+                        <a:t>Claimed</a:t>
+                      </a:r>
+                    </a:p>
+                  </a:txBody>
+                  <a:tcPr marL="73152" marR="73152" marT="36576" marB="36576" anchor="ctr">
+                    <a:solidFill>
+                      <a:srgbClr val="F1F0F6"/>
+                    </a:solidFill>
+                  </a:tcPr>
+                </a:tc>
+              </a:tr>
+              <a:tr h="365760">
+                <a:tc>
+                  <a:txBody>
+                    <a:bodyPr wrap="square"/>
+                    <a:lstStyle/>
+                    <a:p>
+                      <a:r>
+                        <a:rPr sz="800" b="1" i="0">
+                          <a:solidFill>
+                            <a:srgbClr val="1B2A55"/>
+                          </a:solidFill>
+                          <a:latin typeface="Inter"/>
+                        </a:rPr>
+                        <a:t>7</a:t>
                       </a:r>
                     </a:p>
                   </a:txBody>
@@ -41441,21 +42245,153 @@
                     </a:solidFill>
                   </a:tcPr>
                 </a:tc>
+                <a:tc>
+                  <a:txBody>
+                    <a:bodyPr wrap="square"/>
+                    <a:lstStyle/>
+                    <a:p>
+                      <a:r>
+                        <a:rPr sz="800" b="0" i="0">
+                          <a:solidFill>
+                            <a:srgbClr val="353B4A"/>
+                          </a:solidFill>
+                          <a:latin typeface="Inter"/>
+                        </a:rPr>
+                        <a:t>i-PACT 2027</a:t>
+                      </a:r>
+                    </a:p>
+                  </a:txBody>
+                  <a:tcPr marL="73152" marR="73152" marT="36576" marB="36576" anchor="ctr">
+                    <a:solidFill>
+                      <a:srgbClr val="FFFFFF"/>
+                    </a:solidFill>
+                  </a:tcPr>
+                </a:tc>
+                <a:tc>
+                  <a:txBody>
+                    <a:bodyPr wrap="square"/>
+                    <a:lstStyle/>
+                    <a:p>
+                      <a:r>
+                        <a:rPr sz="800" b="0" i="0">
+                          <a:solidFill>
+                            <a:srgbClr val="353B4A"/>
+                          </a:solidFill>
+                          <a:latin typeface="Inter"/>
+                        </a:rPr>
+                        <a:t>VIT, Vellore (Overall 21)</a:t>
+                      </a:r>
+                    </a:p>
+                  </a:txBody>
+                  <a:tcPr marL="73152" marR="73152" marT="36576" marB="36576" anchor="ctr">
+                    <a:solidFill>
+                      <a:srgbClr val="FFFFFF"/>
+                    </a:solidFill>
+                  </a:tcPr>
+                </a:tc>
+                <a:tc>
+                  <a:txBody>
+                    <a:bodyPr wrap="square"/>
+                    <a:lstStyle/>
+                    <a:p>
+                      <a:r>
+                        <a:rPr sz="800" b="0" i="0">
+                          <a:solidFill>
+                            <a:srgbClr val="353B4A"/>
+                          </a:solidFill>
+                          <a:latin typeface="Inter"/>
+                        </a:rPr>
+                        <a:t>31 May 2027</a:t>
+                      </a:r>
+                    </a:p>
+                  </a:txBody>
+                  <a:tcPr marL="73152" marR="73152" marT="36576" marB="36576" anchor="ctr">
+                    <a:solidFill>
+                      <a:srgbClr val="FFFFFF"/>
+                    </a:solidFill>
+                  </a:tcPr>
+                </a:tc>
+                <a:tc>
+                  <a:txBody>
+                    <a:bodyPr wrap="square"/>
+                    <a:lstStyle/>
+                    <a:p>
+                      <a:r>
+                        <a:rPr sz="800" b="0" i="0">
+                          <a:solidFill>
+                            <a:srgbClr val="353B4A"/>
+                          </a:solidFill>
+                          <a:latin typeface="Inter"/>
+                        </a:rPr>
+                        <a:t>12,000</a:t>
+                      </a:r>
+                    </a:p>
+                  </a:txBody>
+                  <a:tcPr marL="73152" marR="73152" marT="36576" marB="36576" anchor="ctr">
+                    <a:solidFill>
+                      <a:srgbClr val="FFFFFF"/>
+                    </a:solidFill>
+                  </a:tcPr>
+                </a:tc>
+                <a:tc>
+                  <a:txBody>
+                    <a:bodyPr wrap="square"/>
+                    <a:lstStyle/>
+                    <a:p>
+                      <a:r>
+                        <a:rPr sz="800" b="0" i="0">
+                          <a:solidFill>
+                            <a:srgbClr val="353B4A"/>
+                          </a:solidFill>
+                          <a:latin typeface="Inter"/>
+                        </a:rPr>
+                        <a:t>2-3 Sep 2027</a:t>
+                      </a:r>
+                    </a:p>
+                  </a:txBody>
+                  <a:tcPr marL="73152" marR="73152" marT="36576" marB="36576" anchor="ctr">
+                    <a:solidFill>
+                      <a:srgbClr val="FFFFFF"/>
+                    </a:solidFill>
+                  </a:tcPr>
+                </a:tc>
+                <a:tc>
+                  <a:txBody>
+                    <a:bodyPr wrap="square"/>
+                    <a:lstStyle/>
+                    <a:p>
+                      <a:r>
+                        <a:rPr sz="800" b="0" i="0">
+                          <a:solidFill>
+                            <a:srgbClr val="353B4A"/>
+                          </a:solidFill>
+                          <a:latin typeface="Inter"/>
+                        </a:rPr>
+                        <a:t>Claimed</a:t>
+                      </a:r>
+                    </a:p>
+                  </a:txBody>
+                  <a:tcPr marL="73152" marR="73152" marT="36576" marB="36576" anchor="ctr">
+                    <a:solidFill>
+                      <a:srgbClr val="FFFFFF"/>
+                    </a:solidFill>
+                  </a:tcPr>
+                </a:tc>
               </a:tr>
-              <a:tr h="301752">
-                <a:tc>
-                  <a:txBody>
-                    <a:bodyPr wrap="square"/>
-                    <a:lstStyle/>
-                    <a:p>
-                      <a:r>
-                        <a:rPr sz="850" b="1" i="0">
+              <a:tr h="365760">
+                <a:tc>
+                  <a:txBody>
+                    <a:bodyPr wrap="square"/>
+                    <a:lstStyle/>
+                    <a:p>
+                      <a:r>
+                        <a:rPr sz="800" b="1" i="0">
                           <a:solidFill>
                             <a:srgbClr val="1B2A55"/>
                           </a:solidFill>
                           <a:latin typeface="Inter"/>
                         </a:rPr>
-                        <a:t>2</a:t>
+                        <a:t>8</a:t>
                       </a:r>
                     </a:p>
                   </a:txBody>
@@ -41471,13 +42407,13 @@
                     <a:lstStyle/>
                     <a:p>
                       <a:r>
-                        <a:rPr sz="850" b="0" i="0">
+                        <a:rPr sz="800" b="0" i="0">
                           <a:solidFill>
                             <a:srgbClr val="353B4A"/>
                           </a:solidFill>
                           <a:latin typeface="Inter"/>
                         </a:rPr>
-                        <a:t>INDIACom-2027</a:t>
+                        <a:t>ICICC-2027</a:t>
                       </a:r>
                     </a:p>
                   </a:txBody>
@@ -41493,13 +42429,13 @@
                     <a:lstStyle/>
                     <a:p>
                       <a:r>
-                        <a:rPr sz="850" b="0" i="0">
+                        <a:rPr sz="800" b="0" i="0">
                           <a:solidFill>
                             <a:srgbClr val="353B4A"/>
                           </a:solidFill>
                           <a:latin typeface="Inter"/>
                         </a:rPr>
-                        <a:t>7 Dec 2026</a:t>
+                        <a:t>Shaheed Sukhdev College, Univ. of Delhi (parent only, Overall 15)</a:t>
                       </a:r>
                     </a:p>
                   </a:txBody>
@@ -41515,13 +42451,13 @@
                     <a:lstStyle/>
                     <a:p>
                       <a:r>
-                        <a:rPr sz="850" b="0" i="0">
+                        <a:rPr sz="800" b="0" i="0">
                           <a:solidFill>
                             <a:srgbClr val="353B4A"/>
                           </a:solidFill>
                           <a:latin typeface="Inter"/>
                         </a:rPr>
-                        <a:t>INR 8,000 + GST</a:t>
+                        <a:t>30 Oct 2026</a:t>
                       </a:r>
                     </a:p>
                   </a:txBody>
@@ -41537,13 +42473,13 @@
                     <a:lstStyle/>
                     <a:p>
                       <a:r>
-                        <a:rPr sz="850" b="0" i="0">
+                        <a:rPr sz="800" b="0" i="0">
                           <a:solidFill>
                             <a:srgbClr val="353B4A"/>
                           </a:solidFill>
                           <a:latin typeface="Inter"/>
                         </a:rPr>
-                        <a:t>New Delhi, India</a:t>
+                        <a:t>13,000</a:t>
                       </a:r>
                     </a:p>
                   </a:txBody>
@@ -41559,13 +42495,13 @@
                     <a:lstStyle/>
                     <a:p>
                       <a:r>
-                        <a:rPr sz="850" b="0" i="0">
+                        <a:rPr sz="800" b="0" i="0">
                           <a:solidFill>
                             <a:srgbClr val="353B4A"/>
                           </a:solidFill>
                           <a:latin typeface="Inter"/>
                         </a:rPr>
-                        <a:t>IEEE approval pending</a:t>
+                        <a:t>5-6 Feb 2027</a:t>
                       </a:r>
                     </a:p>
                   </a:txBody>
@@ -41581,1261 +42517,13 @@
                     <a:lstStyle/>
                     <a:p>
                       <a:r>
-                        <a:rPr sz="850" b="0" i="0">
+                        <a:rPr sz="800" b="0" i="0">
                           <a:solidFill>
                             <a:srgbClr val="353B4A"/>
                           </a:solidFill>
                           <a:latin typeface="Inter"/>
                         </a:rPr>
-                        <a:t>Good</a:t>
-                      </a:r>
-                    </a:p>
-                  </a:txBody>
-                  <a:tcPr marL="73152" marR="73152" marT="36576" marB="36576" anchor="ctr">
-                    <a:solidFill>
-                      <a:srgbClr val="F1F0F6"/>
-                    </a:solidFill>
-                  </a:tcPr>
-                </a:tc>
-              </a:tr>
-              <a:tr h="301752">
-                <a:tc>
-                  <a:txBody>
-                    <a:bodyPr wrap="square"/>
-                    <a:lstStyle/>
-                    <a:p>
-                      <a:r>
-                        <a:rPr sz="850" b="1" i="0">
-                          <a:solidFill>
-                            <a:srgbClr val="1B2A55"/>
-                          </a:solidFill>
-                          <a:latin typeface="Inter"/>
-                        </a:rPr>
-                        <a:t>3</a:t>
-                      </a:r>
-                    </a:p>
-                  </a:txBody>
-                  <a:tcPr marL="73152" marR="73152" marT="36576" marB="36576" anchor="ctr">
-                    <a:solidFill>
-                      <a:srgbClr val="FFFFFF"/>
-                    </a:solidFill>
-                  </a:tcPr>
-                </a:tc>
-                <a:tc>
-                  <a:txBody>
-                    <a:bodyPr wrap="square"/>
-                    <a:lstStyle/>
-                    <a:p>
-                      <a:r>
-                        <a:rPr sz="850" b="0" i="0">
-                          <a:solidFill>
-                            <a:srgbClr val="353B4A"/>
-                          </a:solidFill>
-                          <a:latin typeface="Inter"/>
-                        </a:rPr>
-                        <a:t>IEM-ICDC 2027</a:t>
-                      </a:r>
-                    </a:p>
-                  </a:txBody>
-                  <a:tcPr marL="73152" marR="73152" marT="36576" marB="36576" anchor="ctr">
-                    <a:solidFill>
-                      <a:srgbClr val="FFFFFF"/>
-                    </a:solidFill>
-                  </a:tcPr>
-                </a:tc>
-                <a:tc>
-                  <a:txBody>
-                    <a:bodyPr wrap="square"/>
-                    <a:lstStyle/>
-                    <a:p>
-                      <a:r>
-                        <a:rPr sz="850" b="0" i="0">
-                          <a:solidFill>
-                            <a:srgbClr val="353B4A"/>
-                          </a:solidFill>
-                          <a:latin typeface="Inter"/>
-                        </a:rPr>
-                        <a:t>10 Dec 2026</a:t>
-                      </a:r>
-                    </a:p>
-                  </a:txBody>
-                  <a:tcPr marL="73152" marR="73152" marT="36576" marB="36576" anchor="ctr">
-                    <a:solidFill>
-                      <a:srgbClr val="FFFFFF"/>
-                    </a:solidFill>
-                  </a:tcPr>
-                </a:tc>
-                <a:tc>
-                  <a:txBody>
-                    <a:bodyPr wrap="square"/>
-                    <a:lstStyle/>
-                    <a:p>
-                      <a:r>
-                        <a:rPr sz="850" b="0" i="0">
-                          <a:solidFill>
-                            <a:srgbClr val="353B4A"/>
-                          </a:solidFill>
-                          <a:latin typeface="Inter"/>
-                        </a:rPr>
-                        <a:t>INR 8,000</a:t>
-                      </a:r>
-                    </a:p>
-                  </a:txBody>
-                  <a:tcPr marL="73152" marR="73152" marT="36576" marB="36576" anchor="ctr">
-                    <a:solidFill>
-                      <a:srgbClr val="FFFFFF"/>
-                    </a:solidFill>
-                  </a:tcPr>
-                </a:tc>
-                <a:tc>
-                  <a:txBody>
-                    <a:bodyPr wrap="square"/>
-                    <a:lstStyle/>
-                    <a:p>
-                      <a:r>
-                        <a:rPr sz="850" b="0" i="0">
-                          <a:solidFill>
-                            <a:srgbClr val="353B4A"/>
-                          </a:solidFill>
-                          <a:latin typeface="Inter"/>
-                        </a:rPr>
-                        <a:t>Kolkata, India</a:t>
-                      </a:r>
-                    </a:p>
-                  </a:txBody>
-                  <a:tcPr marL="73152" marR="73152" marT="36576" marB="36576" anchor="ctr">
-                    <a:solidFill>
-                      <a:srgbClr val="FFFFFF"/>
-                    </a:solidFill>
-                  </a:tcPr>
-                </a:tc>
-                <a:tc>
-                  <a:txBody>
-                    <a:bodyPr wrap="square"/>
-                    <a:lstStyle/>
-                    <a:p>
-                      <a:r>
-                        <a:rPr sz="850" b="0" i="0">
-                          <a:solidFill>
-                            <a:srgbClr val="353B4A"/>
-                          </a:solidFill>
-                          <a:latin typeface="Inter"/>
-                        </a:rPr>
-                        <a:t>Springer awaited; 10+ pages</a:t>
-                      </a:r>
-                    </a:p>
-                  </a:txBody>
-                  <a:tcPr marL="73152" marR="73152" marT="36576" marB="36576" anchor="ctr">
-                    <a:solidFill>
-                      <a:srgbClr val="FFFFFF"/>
-                    </a:solidFill>
-                  </a:tcPr>
-                </a:tc>
-                <a:tc>
-                  <a:txBody>
-                    <a:bodyPr wrap="square"/>
-                    <a:lstStyle/>
-                    <a:p>
-                      <a:r>
-                        <a:rPr sz="850" b="0" i="0">
-                          <a:solidFill>
-                            <a:srgbClr val="353B4A"/>
-                          </a:solidFill>
-                          <a:latin typeface="Inter"/>
-                        </a:rPr>
-                        <a:t>Stretch</a:t>
-                      </a:r>
-                    </a:p>
-                  </a:txBody>
-                  <a:tcPr marL="73152" marR="73152" marT="36576" marB="36576" anchor="ctr">
-                    <a:solidFill>
-                      <a:srgbClr val="FFFFFF"/>
-                    </a:solidFill>
-                  </a:tcPr>
-                </a:tc>
-              </a:tr>
-              <a:tr h="301752">
-                <a:tc>
-                  <a:txBody>
-                    <a:bodyPr wrap="square"/>
-                    <a:lstStyle/>
-                    <a:p>
-                      <a:r>
-                        <a:rPr sz="850" b="1" i="0">
-                          <a:solidFill>
-                            <a:srgbClr val="1B2A55"/>
-                          </a:solidFill>
-                          <a:latin typeface="Inter"/>
-                        </a:rPr>
-                        <a:t>4</a:t>
-                      </a:r>
-                    </a:p>
-                  </a:txBody>
-                  <a:tcPr marL="73152" marR="73152" marT="36576" marB="36576" anchor="ctr">
-                    <a:solidFill>
-                      <a:srgbClr val="F1F0F6"/>
-                    </a:solidFill>
-                  </a:tcPr>
-                </a:tc>
-                <a:tc>
-                  <a:txBody>
-                    <a:bodyPr wrap="square"/>
-                    <a:lstStyle/>
-                    <a:p>
-                      <a:r>
-                        <a:rPr sz="850" b="0" i="0">
-                          <a:solidFill>
-                            <a:srgbClr val="353B4A"/>
-                          </a:solidFill>
-                          <a:latin typeface="Inter"/>
-                        </a:rPr>
-                        <a:t>ICRCICN 2027</a:t>
-                      </a:r>
-                    </a:p>
-                  </a:txBody>
-                  <a:tcPr marL="73152" marR="73152" marT="36576" marB="36576" anchor="ctr">
-                    <a:solidFill>
-                      <a:srgbClr val="F1F0F6"/>
-                    </a:solidFill>
-                  </a:tcPr>
-                </a:tc>
-                <a:tc>
-                  <a:txBody>
-                    <a:bodyPr wrap="square"/>
-                    <a:lstStyle/>
-                    <a:p>
-                      <a:r>
-                        <a:rPr sz="850" b="0" i="0">
-                          <a:solidFill>
-                            <a:srgbClr val="353B4A"/>
-                          </a:solidFill>
-                          <a:latin typeface="Inter"/>
-                        </a:rPr>
-                        <a:t>30 Nov 2026</a:t>
-                      </a:r>
-                    </a:p>
-                  </a:txBody>
-                  <a:tcPr marL="73152" marR="73152" marT="36576" marB="36576" anchor="ctr">
-                    <a:solidFill>
-                      <a:srgbClr val="F1F0F6"/>
-                    </a:solidFill>
-                  </a:tcPr>
-                </a:tc>
-                <a:tc>
-                  <a:txBody>
-                    <a:bodyPr wrap="square"/>
-                    <a:lstStyle/>
-                    <a:p>
-                      <a:r>
-                        <a:rPr sz="850" b="0" i="0">
-                          <a:solidFill>
-                            <a:srgbClr val="353B4A"/>
-                          </a:solidFill>
-                          <a:latin typeface="Inter"/>
-                        </a:rPr>
-                        <a:t>INR 8,500</a:t>
-                      </a:r>
-                    </a:p>
-                  </a:txBody>
-                  <a:tcPr marL="73152" marR="73152" marT="36576" marB="36576" anchor="ctr">
-                    <a:solidFill>
-                      <a:srgbClr val="F1F0F6"/>
-                    </a:solidFill>
-                  </a:tcPr>
-                </a:tc>
-                <a:tc>
-                  <a:txBody>
-                    <a:bodyPr wrap="square"/>
-                    <a:lstStyle/>
-                    <a:p>
-                      <a:r>
-                        <a:rPr sz="850" b="0" i="0">
-                          <a:solidFill>
-                            <a:srgbClr val="353B4A"/>
-                          </a:solidFill>
-                          <a:latin typeface="Inter"/>
-                        </a:rPr>
-                        <a:t>Kalyani, India (hybrid)</a:t>
-                      </a:r>
-                    </a:p>
-                  </a:txBody>
-                  <a:tcPr marL="73152" marR="73152" marT="36576" marB="36576" anchor="ctr">
-                    <a:solidFill>
-                      <a:srgbClr val="F1F0F6"/>
-                    </a:solidFill>
-                  </a:tcPr>
-                </a:tc>
-                <a:tc>
-                  <a:txBody>
-                    <a:bodyPr wrap="square"/>
-                    <a:lstStyle/>
-                    <a:p>
-                      <a:r>
-                        <a:rPr sz="850" b="0" i="0">
-                          <a:solidFill>
-                            <a:srgbClr val="353B4A"/>
-                          </a:solidFill>
-                          <a:latin typeface="Inter"/>
-                        </a:rPr>
-                        <a:t>IEEE record 73691; conditional</a:t>
-                      </a:r>
-                    </a:p>
-                  </a:txBody>
-                  <a:tcPr marL="73152" marR="73152" marT="36576" marB="36576" anchor="ctr">
-                    <a:solidFill>
-                      <a:srgbClr val="F1F0F6"/>
-                    </a:solidFill>
-                  </a:tcPr>
-                </a:tc>
-                <a:tc>
-                  <a:txBody>
-                    <a:bodyPr wrap="square"/>
-                    <a:lstStyle/>
-                    <a:p>
-                      <a:r>
-                        <a:rPr sz="850" b="0" i="0">
-                          <a:solidFill>
-                            <a:srgbClr val="353B4A"/>
-                          </a:solidFill>
-                          <a:latin typeface="Inter"/>
-                        </a:rPr>
-                        <a:t>Stretch</a:t>
-                      </a:r>
-                    </a:p>
-                  </a:txBody>
-                  <a:tcPr marL="73152" marR="73152" marT="36576" marB="36576" anchor="ctr">
-                    <a:solidFill>
-                      <a:srgbClr val="F1F0F6"/>
-                    </a:solidFill>
-                  </a:tcPr>
-                </a:tc>
-              </a:tr>
-              <a:tr h="301752">
-                <a:tc>
-                  <a:txBody>
-                    <a:bodyPr wrap="square"/>
-                    <a:lstStyle/>
-                    <a:p>
-                      <a:r>
-                        <a:rPr sz="850" b="1" i="0">
-                          <a:solidFill>
-                            <a:srgbClr val="1B2A55"/>
-                          </a:solidFill>
-                          <a:latin typeface="Inter"/>
-                        </a:rPr>
-                        <a:t>5</a:t>
-                      </a:r>
-                    </a:p>
-                  </a:txBody>
-                  <a:tcPr marL="73152" marR="73152" marT="36576" marB="36576" anchor="ctr">
-                    <a:solidFill>
-                      <a:srgbClr val="FFFFFF"/>
-                    </a:solidFill>
-                  </a:tcPr>
-                </a:tc>
-                <a:tc>
-                  <a:txBody>
-                    <a:bodyPr wrap="square"/>
-                    <a:lstStyle/>
-                    <a:p>
-                      <a:r>
-                        <a:rPr sz="850" b="0" i="0">
-                          <a:solidFill>
-                            <a:srgbClr val="353B4A"/>
-                          </a:solidFill>
-                          <a:latin typeface="Inter"/>
-                        </a:rPr>
-                        <a:t>ICESICSC-2027</a:t>
-                      </a:r>
-                    </a:p>
-                  </a:txBody>
-                  <a:tcPr marL="73152" marR="73152" marT="36576" marB="36576" anchor="ctr">
-                    <a:solidFill>
-                      <a:srgbClr val="FFFFFF"/>
-                    </a:solidFill>
-                  </a:tcPr>
-                </a:tc>
-                <a:tc>
-                  <a:txBody>
-                    <a:bodyPr wrap="square"/>
-                    <a:lstStyle/>
-                    <a:p>
-                      <a:r>
-                        <a:rPr sz="850" b="0" i="0">
-                          <a:solidFill>
-                            <a:srgbClr val="353B4A"/>
-                          </a:solidFill>
-                          <a:latin typeface="Inter"/>
-                        </a:rPr>
-                        <a:t>30 Oct 2026</a:t>
-                      </a:r>
-                    </a:p>
-                  </a:txBody>
-                  <a:tcPr marL="73152" marR="73152" marT="36576" marB="36576" anchor="ctr">
-                    <a:solidFill>
-                      <a:srgbClr val="FFFFFF"/>
-                    </a:solidFill>
-                  </a:tcPr>
-                </a:tc>
-                <a:tc>
-                  <a:txBody>
-                    <a:bodyPr wrap="square"/>
-                    <a:lstStyle/>
-                    <a:p>
-                      <a:r>
-                        <a:rPr sz="850" b="0" i="0">
-                          <a:solidFill>
-                            <a:srgbClr val="353B4A"/>
-                          </a:solidFill>
-                          <a:latin typeface="Inter"/>
-                        </a:rPr>
-                        <a:t>INR 9,000</a:t>
-                      </a:r>
-                    </a:p>
-                  </a:txBody>
-                  <a:tcPr marL="73152" marR="73152" marT="36576" marB="36576" anchor="ctr">
-                    <a:solidFill>
-                      <a:srgbClr val="FFFFFF"/>
-                    </a:solidFill>
-                  </a:tcPr>
-                </a:tc>
-                <a:tc>
-                  <a:txBody>
-                    <a:bodyPr wrap="square"/>
-                    <a:lstStyle/>
-                    <a:p>
-                      <a:r>
-                        <a:rPr sz="850" b="0" i="0">
-                          <a:solidFill>
-                            <a:srgbClr val="353B4A"/>
-                          </a:solidFill>
-                          <a:latin typeface="Inter"/>
-                        </a:rPr>
-                        <a:t>Bhubaneswar, India</a:t>
-                      </a:r>
-                    </a:p>
-                  </a:txBody>
-                  <a:tcPr marL="73152" marR="73152" marT="36576" marB="36576" anchor="ctr">
-                    <a:solidFill>
-                      <a:srgbClr val="FFFFFF"/>
-                    </a:solidFill>
-                  </a:tcPr>
-                </a:tc>
-                <a:tc>
-                  <a:txBody>
-                    <a:bodyPr wrap="square"/>
-                    <a:lstStyle/>
-                    <a:p>
-                      <a:r>
-                        <a:rPr sz="850" b="0" i="0">
-                          <a:solidFill>
-                            <a:srgbClr val="353B4A"/>
-                          </a:solidFill>
-                          <a:latin typeface="Inter"/>
-                        </a:rPr>
-                        <a:t>Says published by IEEE</a:t>
-                      </a:r>
-                    </a:p>
-                  </a:txBody>
-                  <a:tcPr marL="73152" marR="73152" marT="36576" marB="36576" anchor="ctr">
-                    <a:solidFill>
-                      <a:srgbClr val="FFFFFF"/>
-                    </a:solidFill>
-                  </a:tcPr>
-                </a:tc>
-                <a:tc>
-                  <a:txBody>
-                    <a:bodyPr wrap="square"/>
-                    <a:lstStyle/>
-                    <a:p>
-                      <a:r>
-                        <a:rPr sz="850" b="0" i="0">
-                          <a:solidFill>
-                            <a:srgbClr val="353B4A"/>
-                          </a:solidFill>
-                          <a:latin typeface="Inter"/>
-                        </a:rPr>
-                        <a:t>Good</a:t>
-                      </a:r>
-                    </a:p>
-                  </a:txBody>
-                  <a:tcPr marL="73152" marR="73152" marT="36576" marB="36576" anchor="ctr">
-                    <a:solidFill>
-                      <a:srgbClr val="FFFFFF"/>
-                    </a:solidFill>
-                  </a:tcPr>
-                </a:tc>
-              </a:tr>
-              <a:tr h="301752">
-                <a:tc>
-                  <a:txBody>
-                    <a:bodyPr wrap="square"/>
-                    <a:lstStyle/>
-                    <a:p>
-                      <a:r>
-                        <a:rPr sz="850" b="1" i="0">
-                          <a:solidFill>
-                            <a:srgbClr val="1B2A55"/>
-                          </a:solidFill>
-                          <a:latin typeface="Inter"/>
-                        </a:rPr>
-                        <a:t>6</a:t>
-                      </a:r>
-                    </a:p>
-                  </a:txBody>
-                  <a:tcPr marL="73152" marR="73152" marT="36576" marB="36576" anchor="ctr">
-                    <a:solidFill>
-                      <a:srgbClr val="F1F0F6"/>
-                    </a:solidFill>
-                  </a:tcPr>
-                </a:tc>
-                <a:tc>
-                  <a:txBody>
-                    <a:bodyPr wrap="square"/>
-                    <a:lstStyle/>
-                    <a:p>
-                      <a:r>
-                        <a:rPr sz="850" b="0" i="0">
-                          <a:solidFill>
-                            <a:srgbClr val="353B4A"/>
-                          </a:solidFill>
-                          <a:latin typeface="Inter"/>
-                        </a:rPr>
-                        <a:t>i-PACT 2027 (VIT)</a:t>
-                      </a:r>
-                    </a:p>
-                  </a:txBody>
-                  <a:tcPr marL="73152" marR="73152" marT="36576" marB="36576" anchor="ctr">
-                    <a:solidFill>
-                      <a:srgbClr val="F1F0F6"/>
-                    </a:solidFill>
-                  </a:tcPr>
-                </a:tc>
-                <a:tc>
-                  <a:txBody>
-                    <a:bodyPr wrap="square"/>
-                    <a:lstStyle/>
-                    <a:p>
-                      <a:r>
-                        <a:rPr sz="850" b="0" i="0">
-                          <a:solidFill>
-                            <a:srgbClr val="353B4A"/>
-                          </a:solidFill>
-                          <a:latin typeface="Inter"/>
-                        </a:rPr>
-                        <a:t>31 May 2027</a:t>
-                      </a:r>
-                    </a:p>
-                  </a:txBody>
-                  <a:tcPr marL="73152" marR="73152" marT="36576" marB="36576" anchor="ctr">
-                    <a:solidFill>
-                      <a:srgbClr val="F1F0F6"/>
-                    </a:solidFill>
-                  </a:tcPr>
-                </a:tc>
-                <a:tc>
-                  <a:txBody>
-                    <a:bodyPr wrap="square"/>
-                    <a:lstStyle/>
-                    <a:p>
-                      <a:r>
-                        <a:rPr sz="850" b="0" i="0">
-                          <a:solidFill>
-                            <a:srgbClr val="353B4A"/>
-                          </a:solidFill>
-                          <a:latin typeface="Inter"/>
-                        </a:rPr>
-                        <a:t>INR 12,000</a:t>
-                      </a:r>
-                    </a:p>
-                  </a:txBody>
-                  <a:tcPr marL="73152" marR="73152" marT="36576" marB="36576" anchor="ctr">
-                    <a:solidFill>
-                      <a:srgbClr val="F1F0F6"/>
-                    </a:solidFill>
-                  </a:tcPr>
-                </a:tc>
-                <a:tc>
-                  <a:txBody>
-                    <a:bodyPr wrap="square"/>
-                    <a:lstStyle/>
-                    <a:p>
-                      <a:r>
-                        <a:rPr sz="850" b="0" i="0">
-                          <a:solidFill>
-                            <a:srgbClr val="353B4A"/>
-                          </a:solidFill>
-                          <a:latin typeface="Inter"/>
-                        </a:rPr>
-                        <a:t>Vellore, India</a:t>
-                      </a:r>
-                    </a:p>
-                  </a:txBody>
-                  <a:tcPr marL="73152" marR="73152" marT="36576" marB="36576" anchor="ctr">
-                    <a:solidFill>
-                      <a:srgbClr val="F1F0F6"/>
-                    </a:solidFill>
-                  </a:tcPr>
-                </a:tc>
-                <a:tc>
-                  <a:txBody>
-                    <a:bodyPr wrap="square"/>
-                    <a:lstStyle/>
-                    <a:p>
-                      <a:r>
-                        <a:rPr sz="850" b="0" i="0">
-                          <a:solidFill>
-                            <a:srgbClr val="353B4A"/>
-                          </a:solidFill>
-                          <a:latin typeface="Inter"/>
-                        </a:rPr>
-                        <a:t>Recommended to IEEE</a:t>
-                      </a:r>
-                    </a:p>
-                  </a:txBody>
-                  <a:tcPr marL="73152" marR="73152" marT="36576" marB="36576" anchor="ctr">
-                    <a:solidFill>
-                      <a:srgbClr val="F1F0F6"/>
-                    </a:solidFill>
-                  </a:tcPr>
-                </a:tc>
-                <a:tc>
-                  <a:txBody>
-                    <a:bodyPr wrap="square"/>
-                    <a:lstStyle/>
-                    <a:p>
-                      <a:r>
-                        <a:rPr sz="850" b="0" i="0">
-                          <a:solidFill>
-                            <a:srgbClr val="353B4A"/>
-                          </a:solidFill>
-                          <a:latin typeface="Inter"/>
-                        </a:rPr>
-                        <a:t>Stretch</a:t>
-                      </a:r>
-                    </a:p>
-                  </a:txBody>
-                  <a:tcPr marL="73152" marR="73152" marT="36576" marB="36576" anchor="ctr">
-                    <a:solidFill>
-                      <a:srgbClr val="F1F0F6"/>
-                    </a:solidFill>
-                  </a:tcPr>
-                </a:tc>
-              </a:tr>
-              <a:tr h="301752">
-                <a:tc>
-                  <a:txBody>
-                    <a:bodyPr wrap="square"/>
-                    <a:lstStyle/>
-                    <a:p>
-                      <a:r>
-                        <a:rPr sz="850" b="1" i="0">
-                          <a:solidFill>
-                            <a:srgbClr val="1B2A55"/>
-                          </a:solidFill>
-                          <a:latin typeface="Inter"/>
-                        </a:rPr>
-                        <a:t>7</a:t>
-                      </a:r>
-                    </a:p>
-                  </a:txBody>
-                  <a:tcPr marL="73152" marR="73152" marT="36576" marB="36576" anchor="ctr">
-                    <a:solidFill>
-                      <a:srgbClr val="FFFFFF"/>
-                    </a:solidFill>
-                  </a:tcPr>
-                </a:tc>
-                <a:tc>
-                  <a:txBody>
-                    <a:bodyPr wrap="square"/>
-                    <a:lstStyle/>
-                    <a:p>
-                      <a:r>
-                        <a:rPr sz="850" b="0" i="0">
-                          <a:solidFill>
-                            <a:srgbClr val="353B4A"/>
-                          </a:solidFill>
-                          <a:latin typeface="Inter"/>
-                        </a:rPr>
-                        <a:t>ISDFS 2027</a:t>
-                      </a:r>
-                    </a:p>
-                  </a:txBody>
-                  <a:tcPr marL="73152" marR="73152" marT="36576" marB="36576" anchor="ctr">
-                    <a:solidFill>
-                      <a:srgbClr val="FFFFFF"/>
-                    </a:solidFill>
-                  </a:tcPr>
-                </a:tc>
-                <a:tc>
-                  <a:txBody>
-                    <a:bodyPr wrap="square"/>
-                    <a:lstStyle/>
-                    <a:p>
-                      <a:r>
-                        <a:rPr sz="850" b="0" i="0">
-                          <a:solidFill>
-                            <a:srgbClr val="353B4A"/>
-                          </a:solidFill>
-                          <a:latin typeface="Inter"/>
-                        </a:rPr>
-                        <a:t>31 Jan 2027</a:t>
-                      </a:r>
-                    </a:p>
-                  </a:txBody>
-                  <a:tcPr marL="73152" marR="73152" marT="36576" marB="36576" anchor="ctr">
-                    <a:solidFill>
-                      <a:srgbClr val="FFFFFF"/>
-                    </a:solidFill>
-                  </a:tcPr>
-                </a:tc>
-                <a:tc>
-                  <a:txBody>
-                    <a:bodyPr wrap="square"/>
-                    <a:lstStyle/>
-                    <a:p>
-                      <a:r>
-                        <a:rPr sz="850" b="0" i="0">
-                          <a:solidFill>
-                            <a:srgbClr val="353B4A"/>
-                          </a:solidFill>
-                          <a:latin typeface="Inter"/>
-                        </a:rPr>
-                        <a:t>USD 500 (~INR 47,000)</a:t>
-                      </a:r>
-                    </a:p>
-                  </a:txBody>
-                  <a:tcPr marL="73152" marR="73152" marT="36576" marB="36576" anchor="ctr">
-                    <a:solidFill>
-                      <a:srgbClr val="FFFFFF"/>
-                    </a:solidFill>
-                  </a:tcPr>
-                </a:tc>
-                <a:tc>
-                  <a:txBody>
-                    <a:bodyPr wrap="square"/>
-                    <a:lstStyle/>
-                    <a:p>
-                      <a:r>
-                        <a:rPr sz="850" b="0" i="0">
-                          <a:solidFill>
-                            <a:srgbClr val="353B4A"/>
-                          </a:solidFill>
-                          <a:latin typeface="Inter"/>
-                        </a:rPr>
-                        <a:t>San Jose, USA (online ok)</a:t>
-                      </a:r>
-                    </a:p>
-                  </a:txBody>
-                  <a:tcPr marL="73152" marR="73152" marT="36576" marB="36576" anchor="ctr">
-                    <a:solidFill>
-                      <a:srgbClr val="FFFFFF"/>
-                    </a:solidFill>
-                  </a:tcPr>
-                </a:tc>
-                <a:tc>
-                  <a:txBody>
-                    <a:bodyPr wrap="square"/>
-                    <a:lstStyle/>
-                    <a:p>
-                      <a:r>
-                        <a:rPr sz="850" b="0" i="0">
-                          <a:solidFill>
-                            <a:srgbClr val="353B4A"/>
-                          </a:solidFill>
-                          <a:latin typeface="Inter"/>
-                        </a:rPr>
-                        <a:t>Submitted for IEEE Xplore</a:t>
-                      </a:r>
-                    </a:p>
-                  </a:txBody>
-                  <a:tcPr marL="73152" marR="73152" marT="36576" marB="36576" anchor="ctr">
-                    <a:solidFill>
-                      <a:srgbClr val="FFFFFF"/>
-                    </a:solidFill>
-                  </a:tcPr>
-                </a:tc>
-                <a:tc>
-                  <a:txBody>
-                    <a:bodyPr wrap="square"/>
-                    <a:lstStyle/>
-                    <a:p>
-                      <a:r>
-                        <a:rPr sz="850" b="0" i="0">
-                          <a:solidFill>
-                            <a:srgbClr val="353B4A"/>
-                          </a:solidFill>
-                          <a:latin typeface="Inter"/>
-                        </a:rPr>
-                        <a:t>Stretch</a:t>
-                      </a:r>
-                    </a:p>
-                  </a:txBody>
-                  <a:tcPr marL="73152" marR="73152" marT="36576" marB="36576" anchor="ctr">
-                    <a:solidFill>
-                      <a:srgbClr val="FFFFFF"/>
-                    </a:solidFill>
-                  </a:tcPr>
-                </a:tc>
-              </a:tr>
-              <a:tr h="301752">
-                <a:tc>
-                  <a:txBody>
-                    <a:bodyPr wrap="square"/>
-                    <a:lstStyle/>
-                    <a:p>
-                      <a:r>
-                        <a:rPr sz="850" b="1" i="0">
-                          <a:solidFill>
-                            <a:srgbClr val="1B2A55"/>
-                          </a:solidFill>
-                          <a:latin typeface="Inter"/>
-                        </a:rPr>
-                        <a:t>8</a:t>
-                      </a:r>
-                    </a:p>
-                  </a:txBody>
-                  <a:tcPr marL="73152" marR="73152" marT="36576" marB="36576" anchor="ctr">
-                    <a:solidFill>
-                      <a:srgbClr val="F1F0F6"/>
-                    </a:solidFill>
-                  </a:tcPr>
-                </a:tc>
-                <a:tc>
-                  <a:txBody>
-                    <a:bodyPr wrap="square"/>
-                    <a:lstStyle/>
-                    <a:p>
-                      <a:r>
-                        <a:rPr sz="850" b="0" i="0">
-                          <a:solidFill>
-                            <a:srgbClr val="353B4A"/>
-                          </a:solidFill>
-                          <a:latin typeface="Inter"/>
-                        </a:rPr>
-                        <a:t>ICISSP 2027</a:t>
-                      </a:r>
-                    </a:p>
-                  </a:txBody>
-                  <a:tcPr marL="73152" marR="73152" marT="36576" marB="36576" anchor="ctr">
-                    <a:solidFill>
-                      <a:srgbClr val="F1F0F6"/>
-                    </a:solidFill>
-                  </a:tcPr>
-                </a:tc>
-                <a:tc>
-                  <a:txBody>
-                    <a:bodyPr wrap="square"/>
-                    <a:lstStyle/>
-                    <a:p>
-                      <a:r>
-                        <a:rPr sz="850" b="0" i="0">
-                          <a:solidFill>
-                            <a:srgbClr val="353B4A"/>
-                          </a:solidFill>
-                          <a:latin typeface="Inter"/>
-                        </a:rPr>
-                        <a:t>29 Oct 2026</a:t>
-                      </a:r>
-                    </a:p>
-                  </a:txBody>
-                  <a:tcPr marL="73152" marR="73152" marT="36576" marB="36576" anchor="ctr">
-                    <a:solidFill>
-                      <a:srgbClr val="F1F0F6"/>
-                    </a:solidFill>
-                  </a:tcPr>
-                </a:tc>
-                <a:tc>
-                  <a:txBody>
-                    <a:bodyPr wrap="square"/>
-                    <a:lstStyle/>
-                    <a:p>
-                      <a:r>
-                        <a:rPr sz="850" b="0" i="0">
-                          <a:solidFill>
-                            <a:srgbClr val="353B4A"/>
-                          </a:solidFill>
-                          <a:latin typeface="Inter"/>
-                        </a:rPr>
-                        <a:t>EUR 640 (~INR 68,000)</a:t>
-                      </a:r>
-                    </a:p>
-                  </a:txBody>
-                  <a:tcPr marL="73152" marR="73152" marT="36576" marB="36576" anchor="ctr">
-                    <a:solidFill>
-                      <a:srgbClr val="F1F0F6"/>
-                    </a:solidFill>
-                  </a:tcPr>
-                </a:tc>
-                <a:tc>
-                  <a:txBody>
-                    <a:bodyPr wrap="square"/>
-                    <a:lstStyle/>
-                    <a:p>
-                      <a:r>
-                        <a:rPr sz="850" b="0" i="0">
-                          <a:solidFill>
-                            <a:srgbClr val="353B4A"/>
-                          </a:solidFill>
-                          <a:latin typeface="Inter"/>
-                        </a:rPr>
-                        <a:t>Valletta, Malta</a:t>
-                      </a:r>
-                    </a:p>
-                  </a:txBody>
-                  <a:tcPr marL="73152" marR="73152" marT="36576" marB="36576" anchor="ctr">
-                    <a:solidFill>
-                      <a:srgbClr val="F1F0F6"/>
-                    </a:solidFill>
-                  </a:tcPr>
-                </a:tc>
-                <a:tc>
-                  <a:txBody>
-                    <a:bodyPr wrap="square"/>
-                    <a:lstStyle/>
-                    <a:p>
-                      <a:r>
-                        <a:rPr sz="850" b="0" i="0">
-                          <a:solidFill>
-                            <a:srgbClr val="353B4A"/>
-                          </a:solidFill>
-                          <a:latin typeface="Inter"/>
-                        </a:rPr>
-                        <a:t>Submitted for evaluation</a:t>
-                      </a:r>
-                    </a:p>
-                  </a:txBody>
-                  <a:tcPr marL="73152" marR="73152" marT="36576" marB="36576" anchor="ctr">
-                    <a:solidFill>
-                      <a:srgbClr val="F1F0F6"/>
-                    </a:solidFill>
-                  </a:tcPr>
-                </a:tc>
-                <a:tc>
-                  <a:txBody>
-                    <a:bodyPr wrap="square"/>
-                    <a:lstStyle/>
-                    <a:p>
-                      <a:r>
-                        <a:rPr sz="850" b="0" i="0">
-                          <a:solidFill>
-                            <a:srgbClr val="353B4A"/>
-                          </a:solidFill>
-                          <a:latin typeface="Inter"/>
-                        </a:rPr>
-                        <a:t>Good</a:t>
-                      </a:r>
-                    </a:p>
-                  </a:txBody>
-                  <a:tcPr marL="73152" marR="73152" marT="36576" marB="36576" anchor="ctr">
-                    <a:solidFill>
-                      <a:srgbClr val="F1F0F6"/>
-                    </a:solidFill>
-                  </a:tcPr>
-                </a:tc>
-              </a:tr>
-              <a:tr h="301752">
-                <a:tc>
-                  <a:txBody>
-                    <a:bodyPr wrap="square"/>
-                    <a:lstStyle/>
-                    <a:p>
-                      <a:r>
-                        <a:rPr sz="850" b="1" i="0">
-                          <a:solidFill>
-                            <a:srgbClr val="1B2A55"/>
-                          </a:solidFill>
-                          <a:latin typeface="Inter"/>
-                        </a:rPr>
-                        <a:t>9</a:t>
-                      </a:r>
-                    </a:p>
-                  </a:txBody>
-                  <a:tcPr marL="73152" marR="73152" marT="36576" marB="36576" anchor="ctr">
-                    <a:solidFill>
-                      <a:srgbClr val="FFFFFF"/>
-                    </a:solidFill>
-                  </a:tcPr>
-                </a:tc>
-                <a:tc>
-                  <a:txBody>
-                    <a:bodyPr wrap="square"/>
-                    <a:lstStyle/>
-                    <a:p>
-                      <a:r>
-                        <a:rPr sz="850" b="0" i="0">
-                          <a:solidFill>
-                            <a:srgbClr val="353B4A"/>
-                          </a:solidFill>
-                          <a:latin typeface="Inter"/>
-                        </a:rPr>
-                        <a:t>DATA 2027</a:t>
-                      </a:r>
-                    </a:p>
-                  </a:txBody>
-                  <a:tcPr marL="73152" marR="73152" marT="36576" marB="36576" anchor="ctr">
-                    <a:solidFill>
-                      <a:srgbClr val="FFFFFF"/>
-                    </a:solidFill>
-                  </a:tcPr>
-                </a:tc>
-                <a:tc>
-                  <a:txBody>
-                    <a:bodyPr wrap="square"/>
-                    <a:lstStyle/>
-                    <a:p>
-                      <a:r>
-                        <a:rPr sz="850" b="0" i="0">
-                          <a:solidFill>
-                            <a:srgbClr val="353B4A"/>
-                          </a:solidFill>
-                          <a:latin typeface="Inter"/>
-                        </a:rPr>
-                        <a:t>16 Feb / 25 Mar</a:t>
-                      </a:r>
-                    </a:p>
-                  </a:txBody>
-                  <a:tcPr marL="73152" marR="73152" marT="36576" marB="36576" anchor="ctr">
-                    <a:solidFill>
-                      <a:srgbClr val="FFFFFF"/>
-                    </a:solidFill>
-                  </a:tcPr>
-                </a:tc>
-                <a:tc>
-                  <a:txBody>
-                    <a:bodyPr wrap="square"/>
-                    <a:lstStyle/>
-                    <a:p>
-                      <a:r>
-                        <a:rPr sz="850" b="0" i="0">
-                          <a:solidFill>
-                            <a:srgbClr val="353B4A"/>
-                          </a:solidFill>
-                          <a:latin typeface="Inter"/>
-                        </a:rPr>
-                        <a:t>EUR 640 (~INR 68,000)</a:t>
-                      </a:r>
-                    </a:p>
-                  </a:txBody>
-                  <a:tcPr marL="73152" marR="73152" marT="36576" marB="36576" anchor="ctr">
-                    <a:solidFill>
-                      <a:srgbClr val="FFFFFF"/>
-                    </a:solidFill>
-                  </a:tcPr>
-                </a:tc>
-                <a:tc>
-                  <a:txBody>
-                    <a:bodyPr wrap="square"/>
-                    <a:lstStyle/>
-                    <a:p>
-                      <a:r>
-                        <a:rPr sz="850" b="0" i="0">
-                          <a:solidFill>
-                            <a:srgbClr val="353B4A"/>
-                          </a:solidFill>
-                          <a:latin typeface="Inter"/>
-                        </a:rPr>
-                        <a:t>Rome, Italy</a:t>
-                      </a:r>
-                    </a:p>
-                  </a:txBody>
-                  <a:tcPr marL="73152" marR="73152" marT="36576" marB="36576" anchor="ctr">
-                    <a:solidFill>
-                      <a:srgbClr val="FFFFFF"/>
-                    </a:solidFill>
-                  </a:tcPr>
-                </a:tc>
-                <a:tc>
-                  <a:txBody>
-                    <a:bodyPr wrap="square"/>
-                    <a:lstStyle/>
-                    <a:p>
-                      <a:r>
-                        <a:rPr sz="850" b="0" i="0">
-                          <a:solidFill>
-                            <a:srgbClr val="353B4A"/>
-                          </a:solidFill>
-                          <a:latin typeface="Inter"/>
-                        </a:rPr>
-                        <a:t>Not confirmed</a:t>
-                      </a:r>
-                    </a:p>
-                  </a:txBody>
-                  <a:tcPr marL="73152" marR="73152" marT="36576" marB="36576" anchor="ctr">
-                    <a:solidFill>
-                      <a:srgbClr val="FFFFFF"/>
-                    </a:solidFill>
-                  </a:tcPr>
-                </a:tc>
-                <a:tc>
-                  <a:txBody>
-                    <a:bodyPr wrap="square"/>
-                    <a:lstStyle/>
-                    <a:p>
-                      <a:r>
-                        <a:rPr sz="850" b="0" i="0">
-                          <a:solidFill>
-                            <a:srgbClr val="353B4A"/>
-                          </a:solidFill>
-                          <a:latin typeface="Inter"/>
-                        </a:rPr>
-                        <a:t>Good</a:t>
-                      </a:r>
-                    </a:p>
-                  </a:txBody>
-                  <a:tcPr marL="73152" marR="73152" marT="36576" marB="36576" anchor="ctr">
-                    <a:solidFill>
-                      <a:srgbClr val="FFFFFF"/>
-                    </a:solidFill>
-                  </a:tcPr>
-                </a:tc>
-              </a:tr>
-              <a:tr h="301752">
-                <a:tc>
-                  <a:txBody>
-                    <a:bodyPr wrap="square"/>
-                    <a:lstStyle/>
-                    <a:p>
-                      <a:r>
-                        <a:rPr sz="850" b="1" i="0">
-                          <a:solidFill>
-                            <a:srgbClr val="1B2A55"/>
-                          </a:solidFill>
-                          <a:latin typeface="Inter"/>
-                        </a:rPr>
-                        <a:t>10</a:t>
-                      </a:r>
-                    </a:p>
-                  </a:txBody>
-                  <a:tcPr marL="73152" marR="73152" marT="36576" marB="36576" anchor="ctr">
-                    <a:solidFill>
-                      <a:srgbClr val="F1F0F6"/>
-                    </a:solidFill>
-                  </a:tcPr>
-                </a:tc>
-                <a:tc>
-                  <a:txBody>
-                    <a:bodyPr wrap="square"/>
-                    <a:lstStyle/>
-                    <a:p>
-                      <a:r>
-                        <a:rPr sz="850" b="0" i="0">
-                          <a:solidFill>
-                            <a:srgbClr val="353B4A"/>
-                          </a:solidFill>
-                          <a:latin typeface="Inter"/>
-                        </a:rPr>
-                        <a:t>ICEIS 2027</a:t>
-                      </a:r>
-                    </a:p>
-                  </a:txBody>
-                  <a:tcPr marL="73152" marR="73152" marT="36576" marB="36576" anchor="ctr">
-                    <a:solidFill>
-                      <a:srgbClr val="F1F0F6"/>
-                    </a:solidFill>
-                  </a:tcPr>
-                </a:tc>
-                <a:tc>
-                  <a:txBody>
-                    <a:bodyPr wrap="square"/>
-                    <a:lstStyle/>
-                    <a:p>
-                      <a:r>
-                        <a:rPr sz="850" b="0" i="0">
-                          <a:solidFill>
-                            <a:srgbClr val="353B4A"/>
-                          </a:solidFill>
-                          <a:latin typeface="Inter"/>
-                        </a:rPr>
-                        <a:t>17 Nov / 21 Dec</a:t>
-                      </a:r>
-                    </a:p>
-                  </a:txBody>
-                  <a:tcPr marL="73152" marR="73152" marT="36576" marB="36576" anchor="ctr">
-                    <a:solidFill>
-                      <a:srgbClr val="F1F0F6"/>
-                    </a:solidFill>
-                  </a:tcPr>
-                </a:tc>
-                <a:tc>
-                  <a:txBody>
-                    <a:bodyPr wrap="square"/>
-                    <a:lstStyle/>
-                    <a:p>
-                      <a:r>
-                        <a:rPr sz="850" b="0" i="0">
-                          <a:solidFill>
-                            <a:srgbClr val="353B4A"/>
-                          </a:solidFill>
-                          <a:latin typeface="Inter"/>
-                        </a:rPr>
-                        <a:t>EUR 680 (~INR 72,000)</a:t>
-                      </a:r>
-                    </a:p>
-                  </a:txBody>
-                  <a:tcPr marL="73152" marR="73152" marT="36576" marB="36576" anchor="ctr">
-                    <a:solidFill>
-                      <a:srgbClr val="F1F0F6"/>
-                    </a:solidFill>
-                  </a:tcPr>
-                </a:tc>
-                <a:tc>
-                  <a:txBody>
-                    <a:bodyPr wrap="square"/>
-                    <a:lstStyle/>
-                    <a:p>
-                      <a:r>
-                        <a:rPr sz="850" b="0" i="0">
-                          <a:solidFill>
-                            <a:srgbClr val="353B4A"/>
-                          </a:solidFill>
-                          <a:latin typeface="Inter"/>
-                        </a:rPr>
-                        <a:t>Rome, Italy</a:t>
-                      </a:r>
-                    </a:p>
-                  </a:txBody>
-                  <a:tcPr marL="73152" marR="73152" marT="36576" marB="36576" anchor="ctr">
-                    <a:solidFill>
-                      <a:srgbClr val="F1F0F6"/>
-                    </a:solidFill>
-                  </a:tcPr>
-                </a:tc>
-                <a:tc>
-                  <a:txBody>
-                    <a:bodyPr wrap="square"/>
-                    <a:lstStyle/>
-                    <a:p>
-                      <a:r>
-                        <a:rPr sz="850" b="0" i="0">
-                          <a:solidFill>
-                            <a:srgbClr val="353B4A"/>
-                          </a:solidFill>
-                          <a:latin typeface="Inter"/>
-                        </a:rPr>
-                        <a:t>Submitted for evaluation</a:t>
-                      </a:r>
-                    </a:p>
-                  </a:txBody>
-                  <a:tcPr marL="73152" marR="73152" marT="36576" marB="36576" anchor="ctr">
-                    <a:solidFill>
-                      <a:srgbClr val="F1F0F6"/>
-                    </a:solidFill>
-                  </a:tcPr>
-                </a:tc>
-                <a:tc>
-                  <a:txBody>
-                    <a:bodyPr wrap="square"/>
-                    <a:lstStyle/>
-                    <a:p>
-                      <a:r>
-                        <a:rPr sz="850" b="0" i="0">
-                          <a:solidFill>
-                            <a:srgbClr val="353B4A"/>
-                          </a:solidFill>
-                          <a:latin typeface="Inter"/>
-                        </a:rPr>
-                        <a:t>Good</a:t>
+                        <a:t>Claimed (LNNS "approved")</a:t>
                       </a:r>
                     </a:p>
                   </a:txBody>
@@ -42858,8 +42546,8 @@
         </p:nvSpPr>
         <p:spPr>
           <a:xfrm>
-            <a:off x="365760" y="4434840"/>
-            <a:ext cx="8412480" cy="411480"/>
+            <a:off x="365760" y="4297680"/>
+            <a:ext cx="8412480" cy="548640"/>
           </a:xfrm>
           <a:prstGeom prst="rect">
             <a:avLst/>
@@ -42878,13 +42566,13 @@
               </a:spcAft>
             </a:pPr>
             <a:r>
-              <a:rPr sz="900" b="0" i="1">
+              <a:rPr sz="800" b="0" i="1">
                 <a:solidFill>
                   <a:srgbClr val="666A78"/>
                 </a:solidFill>
                 <a:latin typeface="Inter"/>
               </a:rPr>
-              <a:t>Fees are per accepted paper and excluding travel, GST and bank charges; INR is approximate at 22 Oct 2026 rates. No venue has yet confirmed indexing; "submitted for" is a plan, not a result.</a:t>
+              <a:t>*Page marks the date tentative.  †Fee read from a flattened table.  "IEEE record shown" means a record number is on the official page, not checked on the IEEE site; nothing here is confirmed for IEEE Xplore. Also qualify, but off-topic or no published fee: ICSEAMS (Amrita), ICCIDS (SSN), PerCom work-in-progress (BITS Pilani Goa), NCC (IISc). Dropped, host not in the top 100: ICRCICN, IEM-ICDC, iConCISE, ICPCSN.</a:t>
             </a:r>
           </a:p>
         </p:txBody>
@@ -42985,7 +42673,7 @@
                 </a:solidFill>
                 <a:latin typeface="Inter"/>
               </a:rPr>
-              <a:t>RECOMMENDED SUBMISSION ORDER</a:t>
+              <a:t>CAN WE GET THE MONEY BACK?</a:t>
             </a:r>
           </a:p>
         </p:txBody>
@@ -43024,7 +42712,7 @@
                 </a:solidFill>
                 <a:latin typeface="Inter"/>
               </a:rPr>
-              <a:t>One venue at a time: dual submission is not allowed</a:t>
+              <a:t>Reimbursement: nothing is documented yet</a:t>
             </a:r>
           </a:p>
         </p:txBody>
@@ -43068,829 +42756,123 @@
           </a:p>
         </p:txBody>
       </p:sp>
-      <p:graphicFrame>
-        <p:nvGraphicFramePr>
-          <p:cNvPr id="6" name="Table 5"/>
-          <p:cNvGraphicFramePr>
-            <a:graphicFrameLocks noGrp="1"/>
-          </p:cNvGraphicFramePr>
-          <p:nvPr/>
-        </p:nvGraphicFramePr>
-        <p:xfrm>
-          <a:off x="457200" y="1097280"/>
-          <a:ext cx="8229600" cy="2889504"/>
-        </p:xfrm>
-        <a:graphic>
-          <a:graphicData uri="http://schemas.openxmlformats.org/drawingml/2006/table">
-            <a:tbl>
-              <a:tblPr firstRow="1" bandRow="1">
-                <a:tableStyleId>{5C22544A-7EE6-4342-B048-85BDC9FD1C3A}</a:tableStyleId>
-              </a:tblPr>
-              <a:tblGrid>
-                <a:gridCol w="548640"/>
-                <a:gridCol w="2103120"/>
-                <a:gridCol w="1280160"/>
-                <a:gridCol w="1188720"/>
-                <a:gridCol w="3108960"/>
-              </a:tblGrid>
-              <a:tr h="365760">
-                <a:tc>
-                  <a:txBody>
-                    <a:bodyPr wrap="square"/>
-                    <a:lstStyle/>
-                    <a:p>
-                      <a:r>
-                        <a:rPr sz="1000" b="1" i="0">
-                          <a:solidFill>
-                            <a:srgbClr val="FFFFFF"/>
-                          </a:solidFill>
-                          <a:latin typeface="Inter"/>
-                        </a:rPr>
-                        <a:t>Step</a:t>
-                      </a:r>
-                    </a:p>
-                  </a:txBody>
-                  <a:tcPr marL="73152" marR="73152" marT="36576" marB="36576" anchor="ctr">
-                    <a:solidFill>
-                      <a:srgbClr val="1B2A55"/>
-                    </a:solidFill>
-                  </a:tcPr>
-                </a:tc>
-                <a:tc>
-                  <a:txBody>
-                    <a:bodyPr wrap="square"/>
-                    <a:lstStyle/>
-                    <a:p>
-                      <a:r>
-                        <a:rPr sz="1000" b="1" i="0">
-                          <a:solidFill>
-                            <a:srgbClr val="FFFFFF"/>
-                          </a:solidFill>
-                          <a:latin typeface="Inter"/>
-                        </a:rPr>
-                        <a:t>Venue</a:t>
-                      </a:r>
-                    </a:p>
-                  </a:txBody>
-                  <a:tcPr marL="73152" marR="73152" marT="36576" marB="36576" anchor="ctr">
-                    <a:solidFill>
-                      <a:srgbClr val="1B2A55"/>
-                    </a:solidFill>
-                  </a:tcPr>
-                </a:tc>
-                <a:tc>
-                  <a:txBody>
-                    <a:bodyPr wrap="square"/>
-                    <a:lstStyle/>
-                    <a:p>
-                      <a:r>
-                        <a:rPr sz="1000" b="1" i="0">
-                          <a:solidFill>
-                            <a:srgbClr val="FFFFFF"/>
-                          </a:solidFill>
-                          <a:latin typeface="Inter"/>
-                        </a:rPr>
-                        <a:t>Submit by</a:t>
-                      </a:r>
-                    </a:p>
-                  </a:txBody>
-                  <a:tcPr marL="73152" marR="73152" marT="36576" marB="36576" anchor="ctr">
-                    <a:solidFill>
-                      <a:srgbClr val="1B2A55"/>
-                    </a:solidFill>
-                  </a:tcPr>
-                </a:tc>
-                <a:tc>
-                  <a:txBody>
-                    <a:bodyPr wrap="square"/>
-                    <a:lstStyle/>
-                    <a:p>
-                      <a:r>
-                        <a:rPr sz="1000" b="1" i="0">
-                          <a:solidFill>
-                            <a:srgbClr val="FFFFFF"/>
-                          </a:solidFill>
-                          <a:latin typeface="Inter"/>
-                        </a:rPr>
-                        <a:t>Decision</a:t>
-                      </a:r>
-                    </a:p>
-                  </a:txBody>
-                  <a:tcPr marL="73152" marR="73152" marT="36576" marB="36576" anchor="ctr">
-                    <a:solidFill>
-                      <a:srgbClr val="1B2A55"/>
-                    </a:solidFill>
-                  </a:tcPr>
-                </a:tc>
-                <a:tc>
-                  <a:txBody>
-                    <a:bodyPr wrap="square"/>
-                    <a:lstStyle/>
-                    <a:p>
-                      <a:r>
-                        <a:rPr sz="1000" b="1" i="0">
-                          <a:solidFill>
-                            <a:srgbClr val="FFFFFF"/>
-                          </a:solidFill>
-                          <a:latin typeface="Inter"/>
-                        </a:rPr>
-                        <a:t>Why this order</a:t>
-                      </a:r>
-                    </a:p>
-                  </a:txBody>
-                  <a:tcPr marL="73152" marR="73152" marT="36576" marB="36576" anchor="ctr">
-                    <a:solidFill>
-                      <a:srgbClr val="1B2A55"/>
-                    </a:solidFill>
-                  </a:tcPr>
-                </a:tc>
-              </a:tr>
-              <a:tr h="420624">
-                <a:tc>
-                  <a:txBody>
-                    <a:bodyPr wrap="square"/>
-                    <a:lstStyle/>
-                    <a:p>
-                      <a:r>
-                        <a:rPr sz="950" b="1" i="0">
-                          <a:solidFill>
-                            <a:srgbClr val="1B2A55"/>
-                          </a:solidFill>
-                          <a:latin typeface="Inter"/>
-                        </a:rPr>
-                        <a:t>1</a:t>
-                      </a:r>
-                    </a:p>
-                  </a:txBody>
-                  <a:tcPr marL="73152" marR="73152" marT="36576" marB="36576" anchor="ctr">
-                    <a:solidFill>
-                      <a:srgbClr val="FFFFFF"/>
-                    </a:solidFill>
-                  </a:tcPr>
-                </a:tc>
-                <a:tc>
-                  <a:txBody>
-                    <a:bodyPr wrap="square"/>
-                    <a:lstStyle/>
-                    <a:p>
-                      <a:r>
-                        <a:rPr sz="950" b="0" i="0">
-                          <a:solidFill>
-                            <a:srgbClr val="353B4A"/>
-                          </a:solidFill>
-                          <a:latin typeface="Inter"/>
-                        </a:rPr>
-                        <a:t>ICISSP 2027 (Malta)</a:t>
-                      </a:r>
-                    </a:p>
-                  </a:txBody>
-                  <a:tcPr marL="73152" marR="73152" marT="36576" marB="36576" anchor="ctr">
-                    <a:solidFill>
-                      <a:srgbClr val="FFFFFF"/>
-                    </a:solidFill>
-                  </a:tcPr>
-                </a:tc>
-                <a:tc>
-                  <a:txBody>
-                    <a:bodyPr wrap="square"/>
-                    <a:lstStyle/>
-                    <a:p>
-                      <a:r>
-                        <a:rPr sz="950" b="0" i="0">
-                          <a:solidFill>
-                            <a:srgbClr val="353B4A"/>
-                          </a:solidFill>
-                          <a:latin typeface="Inter"/>
-                        </a:rPr>
-                        <a:t>29 Oct 2026</a:t>
-                      </a:r>
-                    </a:p>
-                  </a:txBody>
-                  <a:tcPr marL="73152" marR="73152" marT="36576" marB="36576" anchor="ctr">
-                    <a:solidFill>
-                      <a:srgbClr val="FFFFFF"/>
-                    </a:solidFill>
-                  </a:tcPr>
-                </a:tc>
-                <a:tc>
-                  <a:txBody>
-                    <a:bodyPr wrap="square"/>
-                    <a:lstStyle/>
-                    <a:p>
-                      <a:r>
-                        <a:rPr sz="950" b="0" i="0">
-                          <a:solidFill>
-                            <a:srgbClr val="353B4A"/>
-                          </a:solidFill>
-                          <a:latin typeface="Inter"/>
-                        </a:rPr>
-                        <a:t>4 Dec 2026</a:t>
-                      </a:r>
-                    </a:p>
-                  </a:txBody>
-                  <a:tcPr marL="73152" marR="73152" marT="36576" marB="36576" anchor="ctr">
-                    <a:solidFill>
-                      <a:srgbClr val="FFFFFF"/>
-                    </a:solidFill>
-                  </a:tcPr>
-                </a:tc>
-                <a:tc>
-                  <a:txBody>
-                    <a:bodyPr wrap="square"/>
-                    <a:lstStyle/>
-                    <a:p>
-                      <a:r>
-                        <a:rPr sz="950" b="0" i="0">
-                          <a:solidFill>
-                            <a:srgbClr val="353B4A"/>
-                          </a:solidFill>
-                          <a:latin typeface="Inter"/>
-                        </a:rPr>
-                        <a:t>Best topical fit open now; EUR 640 plus travel</a:t>
-                      </a:r>
-                    </a:p>
-                  </a:txBody>
-                  <a:tcPr marL="73152" marR="73152" marT="36576" marB="36576" anchor="ctr">
-                    <a:solidFill>
-                      <a:srgbClr val="FFFFFF"/>
-                    </a:solidFill>
-                  </a:tcPr>
-                </a:tc>
-              </a:tr>
-              <a:tr h="420624">
-                <a:tc>
-                  <a:txBody>
-                    <a:bodyPr wrap="square"/>
-                    <a:lstStyle/>
-                    <a:p>
-                      <a:r>
-                        <a:rPr sz="950" b="1" i="0">
-                          <a:solidFill>
-                            <a:srgbClr val="1B2A55"/>
-                          </a:solidFill>
-                          <a:latin typeface="Inter"/>
-                        </a:rPr>
-                        <a:t>2a</a:t>
-                      </a:r>
-                    </a:p>
-                  </a:txBody>
-                  <a:tcPr marL="73152" marR="73152" marT="36576" marB="36576" anchor="ctr">
-                    <a:solidFill>
-                      <a:srgbClr val="F1F0F6"/>
-                    </a:solidFill>
-                  </a:tcPr>
-                </a:tc>
-                <a:tc>
-                  <a:txBody>
-                    <a:bodyPr wrap="square"/>
-                    <a:lstStyle/>
-                    <a:p>
-                      <a:r>
-                        <a:rPr sz="950" b="0" i="0">
-                          <a:solidFill>
-                            <a:srgbClr val="353B4A"/>
-                          </a:solidFill>
-                          <a:latin typeface="Inter"/>
-                        </a:rPr>
-                        <a:t>INDIACom-2027 (Delhi)</a:t>
-                      </a:r>
-                    </a:p>
-                  </a:txBody>
-                  <a:tcPr marL="73152" marR="73152" marT="36576" marB="36576" anchor="ctr">
-                    <a:solidFill>
-                      <a:srgbClr val="F1F0F6"/>
-                    </a:solidFill>
-                  </a:tcPr>
-                </a:tc>
-                <a:tc>
-                  <a:txBody>
-                    <a:bodyPr wrap="square"/>
-                    <a:lstStyle/>
-                    <a:p>
-                      <a:r>
-                        <a:rPr sz="950" b="0" i="0">
-                          <a:solidFill>
-                            <a:srgbClr val="353B4A"/>
-                          </a:solidFill>
-                          <a:latin typeface="Inter"/>
-                        </a:rPr>
-                        <a:t>7 Dec 2026</a:t>
-                      </a:r>
-                    </a:p>
-                  </a:txBody>
-                  <a:tcPr marL="73152" marR="73152" marT="36576" marB="36576" anchor="ctr">
-                    <a:solidFill>
-                      <a:srgbClr val="F1F0F6"/>
-                    </a:solidFill>
-                  </a:tcPr>
-                </a:tc>
-                <a:tc>
-                  <a:txBody>
-                    <a:bodyPr wrap="square"/>
-                    <a:lstStyle/>
-                    <a:p>
-                      <a:r>
-                        <a:rPr sz="950" b="0" i="0">
-                          <a:solidFill>
-                            <a:srgbClr val="353B4A"/>
-                          </a:solidFill>
-                          <a:latin typeface="Inter"/>
-                        </a:rPr>
-                        <a:t>8 Feb 2027</a:t>
-                      </a:r>
-                    </a:p>
-                  </a:txBody>
-                  <a:tcPr marL="73152" marR="73152" marT="36576" marB="36576" anchor="ctr">
-                    <a:solidFill>
-                      <a:srgbClr val="F1F0F6"/>
-                    </a:solidFill>
-                  </a:tcPr>
-                </a:tc>
-                <a:tc>
-                  <a:txBody>
-                    <a:bodyPr wrap="square"/>
-                    <a:lstStyle/>
-                    <a:p>
-                      <a:r>
-                        <a:rPr sz="950" b="0" i="0">
-                          <a:solidFill>
-                            <a:srgbClr val="353B4A"/>
-                          </a:solidFill>
-                          <a:latin typeface="Inter"/>
-                        </a:rPr>
-                        <a:t>Cheap India fallback if step 1 fails; IEEE not confirmed</a:t>
-                      </a:r>
-                    </a:p>
-                  </a:txBody>
-                  <a:tcPr marL="73152" marR="73152" marT="36576" marB="36576" anchor="ctr">
-                    <a:solidFill>
-                      <a:srgbClr val="F1F0F6"/>
-                    </a:solidFill>
-                  </a:tcPr>
-                </a:tc>
-              </a:tr>
-              <a:tr h="420624">
-                <a:tc>
-                  <a:txBody>
-                    <a:bodyPr wrap="square"/>
-                    <a:lstStyle/>
-                    <a:p>
-                      <a:r>
-                        <a:rPr sz="950" b="1" i="0">
-                          <a:solidFill>
-                            <a:srgbClr val="1B2A55"/>
-                          </a:solidFill>
-                          <a:latin typeface="Inter"/>
-                        </a:rPr>
-                        <a:t>2b</a:t>
-                      </a:r>
-                    </a:p>
-                  </a:txBody>
-                  <a:tcPr marL="73152" marR="73152" marT="36576" marB="36576" anchor="ctr">
-                    <a:solidFill>
-                      <a:srgbClr val="FFFFFF"/>
-                    </a:solidFill>
-                  </a:tcPr>
-                </a:tc>
-                <a:tc>
-                  <a:txBody>
-                    <a:bodyPr wrap="square"/>
-                    <a:lstStyle/>
-                    <a:p>
-                      <a:r>
-                        <a:rPr sz="950" b="0" i="0">
-                          <a:solidFill>
-                            <a:srgbClr val="353B4A"/>
-                          </a:solidFill>
-                          <a:latin typeface="Inter"/>
-                        </a:rPr>
-                        <a:t>Confluence 2027 (Noida)</a:t>
-                      </a:r>
-                    </a:p>
-                  </a:txBody>
-                  <a:tcPr marL="73152" marR="73152" marT="36576" marB="36576" anchor="ctr">
-                    <a:solidFill>
-                      <a:srgbClr val="FFFFFF"/>
-                    </a:solidFill>
-                  </a:tcPr>
-                </a:tc>
-                <a:tc>
-                  <a:txBody>
-                    <a:bodyPr wrap="square"/>
-                    <a:lstStyle/>
-                    <a:p>
-                      <a:r>
-                        <a:rPr sz="950" b="0" i="0">
-                          <a:solidFill>
-                            <a:srgbClr val="353B4A"/>
-                          </a:solidFill>
-                          <a:latin typeface="Inter"/>
-                        </a:rPr>
-                        <a:t>4 Dec 2026</a:t>
-                      </a:r>
-                    </a:p>
-                  </a:txBody>
-                  <a:tcPr marL="73152" marR="73152" marT="36576" marB="36576" anchor="ctr">
-                    <a:solidFill>
-                      <a:srgbClr val="FFFFFF"/>
-                    </a:solidFill>
-                  </a:tcPr>
-                </a:tc>
-                <a:tc>
-                  <a:txBody>
-                    <a:bodyPr wrap="square"/>
-                    <a:lstStyle/>
-                    <a:p>
-                      <a:r>
-                        <a:rPr sz="950" b="0" i="0">
-                          <a:solidFill>
-                            <a:srgbClr val="353B4A"/>
-                          </a:solidFill>
-                          <a:latin typeface="Inter"/>
-                        </a:rPr>
-                        <a:t>25 Dec 2026</a:t>
-                      </a:r>
-                    </a:p>
-                  </a:txBody>
-                  <a:tcPr marL="73152" marR="73152" marT="36576" marB="36576" anchor="ctr">
-                    <a:solidFill>
-                      <a:srgbClr val="FFFFFF"/>
-                    </a:solidFill>
-                  </a:tcPr>
-                </a:tc>
-                <a:tc>
-                  <a:txBody>
-                    <a:bodyPr wrap="square"/>
-                    <a:lstStyle/>
-                    <a:p>
-                      <a:r>
-                        <a:rPr sz="950" b="0" i="0">
-                          <a:solidFill>
-                            <a:srgbClr val="353B4A"/>
-                          </a:solidFill>
-                          <a:latin typeface="Inter"/>
-                        </a:rPr>
-                        <a:t>Alternative to 2a if you want a fast answer</a:t>
-                      </a:r>
-                    </a:p>
-                  </a:txBody>
-                  <a:tcPr marL="73152" marR="73152" marT="36576" marB="36576" anchor="ctr">
-                    <a:solidFill>
-                      <a:srgbClr val="FFFFFF"/>
-                    </a:solidFill>
-                  </a:tcPr>
-                </a:tc>
-              </a:tr>
-              <a:tr h="420624">
-                <a:tc>
-                  <a:txBody>
-                    <a:bodyPr wrap="square"/>
-                    <a:lstStyle/>
-                    <a:p>
-                      <a:r>
-                        <a:rPr sz="950" b="1" i="0">
-                          <a:solidFill>
-                            <a:srgbClr val="1B2A55"/>
-                          </a:solidFill>
-                          <a:latin typeface="Inter"/>
-                        </a:rPr>
-                        <a:t>3</a:t>
-                      </a:r>
-                    </a:p>
-                  </a:txBody>
-                  <a:tcPr marL="73152" marR="73152" marT="36576" marB="36576" anchor="ctr">
-                    <a:solidFill>
-                      <a:srgbClr val="F1F0F6"/>
-                    </a:solidFill>
-                  </a:tcPr>
-                </a:tc>
-                <a:tc>
-                  <a:txBody>
-                    <a:bodyPr wrap="square"/>
-                    <a:lstStyle/>
-                    <a:p>
-                      <a:r>
-                        <a:rPr sz="950" b="0" i="0">
-                          <a:solidFill>
-                            <a:srgbClr val="353B4A"/>
-                          </a:solidFill>
-                          <a:latin typeface="Inter"/>
-                        </a:rPr>
-                        <a:t>ICEIS, IFIP SEC or ICDF2C</a:t>
-                      </a:r>
-                    </a:p>
-                  </a:txBody>
-                  <a:tcPr marL="73152" marR="73152" marT="36576" marB="36576" anchor="ctr">
-                    <a:solidFill>
-                      <a:srgbClr val="F1F0F6"/>
-                    </a:solidFill>
-                  </a:tcPr>
-                </a:tc>
-                <a:tc>
-                  <a:txBody>
-                    <a:bodyPr wrap="square"/>
-                    <a:lstStyle/>
-                    <a:p>
-                      <a:r>
-                        <a:rPr sz="950" b="0" i="0">
-                          <a:solidFill>
-                            <a:srgbClr val="353B4A"/>
-                          </a:solidFill>
-                          <a:latin typeface="Inter"/>
-                        </a:rPr>
-                        <a:t>15-21 Dec 2026</a:t>
-                      </a:r>
-                    </a:p>
-                  </a:txBody>
-                  <a:tcPr marL="73152" marR="73152" marT="36576" marB="36576" anchor="ctr">
-                    <a:solidFill>
-                      <a:srgbClr val="F1F0F6"/>
-                    </a:solidFill>
-                  </a:tcPr>
-                </a:tc>
-                <a:tc>
-                  <a:txBody>
-                    <a:bodyPr wrap="square"/>
-                    <a:lstStyle/>
-                    <a:p>
-                      <a:r>
-                        <a:rPr sz="950" b="0" i="0">
-                          <a:solidFill>
-                            <a:srgbClr val="353B4A"/>
-                          </a:solidFill>
-                          <a:latin typeface="Inter"/>
-                        </a:rPr>
-                        <a:t>mid-Feb 2027</a:t>
-                      </a:r>
-                    </a:p>
-                  </a:txBody>
-                  <a:tcPr marL="73152" marR="73152" marT="36576" marB="36576" anchor="ctr">
-                    <a:solidFill>
-                      <a:srgbClr val="F1F0F6"/>
-                    </a:solidFill>
-                  </a:tcPr>
-                </a:tc>
-                <a:tc>
-                  <a:txBody>
-                    <a:bodyPr wrap="square"/>
-                    <a:lstStyle/>
-                    <a:p>
-                      <a:r>
-                        <a:rPr sz="950" b="0" i="0">
-                          <a:solidFill>
-                            <a:srgbClr val="353B4A"/>
-                          </a:solidFill>
-                          <a:latin typeface="Inter"/>
-                        </a:rPr>
-                        <a:t>Better-quality fallbacks; higher fees and travel</a:t>
-                      </a:r>
-                    </a:p>
-                  </a:txBody>
-                  <a:tcPr marL="73152" marR="73152" marT="36576" marB="36576" anchor="ctr">
-                    <a:solidFill>
-                      <a:srgbClr val="F1F0F6"/>
-                    </a:solidFill>
-                  </a:tcPr>
-                </a:tc>
-              </a:tr>
-              <a:tr h="420624">
-                <a:tc>
-                  <a:txBody>
-                    <a:bodyPr wrap="square"/>
-                    <a:lstStyle/>
-                    <a:p>
-                      <a:r>
-                        <a:rPr sz="950" b="1" i="0">
-                          <a:solidFill>
-                            <a:srgbClr val="1B2A55"/>
-                          </a:solidFill>
-                          <a:latin typeface="Inter"/>
-                        </a:rPr>
-                        <a:t>4</a:t>
-                      </a:r>
-                    </a:p>
-                  </a:txBody>
-                  <a:tcPr marL="73152" marR="73152" marT="36576" marB="36576" anchor="ctr">
-                    <a:solidFill>
-                      <a:srgbClr val="FFFFFF"/>
-                    </a:solidFill>
-                  </a:tcPr>
-                </a:tc>
-                <a:tc>
-                  <a:txBody>
-                    <a:bodyPr wrap="square"/>
-                    <a:lstStyle/>
-                    <a:p>
-                      <a:r>
-                        <a:rPr sz="950" b="0" i="0">
-                          <a:solidFill>
-                            <a:srgbClr val="353B4A"/>
-                          </a:solidFill>
-                          <a:latin typeface="Inter"/>
-                        </a:rPr>
-                        <a:t>ISDFS 2027 (online ok)</a:t>
-                      </a:r>
-                    </a:p>
-                  </a:txBody>
-                  <a:tcPr marL="73152" marR="73152" marT="36576" marB="36576" anchor="ctr">
-                    <a:solidFill>
-                      <a:srgbClr val="FFFFFF"/>
-                    </a:solidFill>
-                  </a:tcPr>
-                </a:tc>
-                <a:tc>
-                  <a:txBody>
-                    <a:bodyPr wrap="square"/>
-                    <a:lstStyle/>
-                    <a:p>
-                      <a:r>
-                        <a:rPr sz="950" b="0" i="0">
-                          <a:solidFill>
-                            <a:srgbClr val="353B4A"/>
-                          </a:solidFill>
-                          <a:latin typeface="Inter"/>
-                        </a:rPr>
-                        <a:t>31 Jan 2027</a:t>
-                      </a:r>
-                    </a:p>
-                  </a:txBody>
-                  <a:tcPr marL="73152" marR="73152" marT="36576" marB="36576" anchor="ctr">
-                    <a:solidFill>
-                      <a:srgbClr val="FFFFFF"/>
-                    </a:solidFill>
-                  </a:tcPr>
-                </a:tc>
-                <a:tc>
-                  <a:txBody>
-                    <a:bodyPr wrap="square"/>
-                    <a:lstStyle/>
-                    <a:p>
-                      <a:r>
-                        <a:rPr sz="950" b="0" i="0">
-                          <a:solidFill>
-                            <a:srgbClr val="353B4A"/>
-                          </a:solidFill>
-                          <a:latin typeface="Inter"/>
-                        </a:rPr>
-                        <a:t>15 Feb 2027</a:t>
-                      </a:r>
-                    </a:p>
-                  </a:txBody>
-                  <a:tcPr marL="73152" marR="73152" marT="36576" marB="36576" anchor="ctr">
-                    <a:solidFill>
-                      <a:srgbClr val="FFFFFF"/>
-                    </a:solidFill>
-                  </a:tcPr>
-                </a:tc>
-                <a:tc>
-                  <a:txBody>
-                    <a:bodyPr wrap="square"/>
-                    <a:lstStyle/>
-                    <a:p>
-                      <a:r>
-                        <a:rPr sz="950" b="0" i="0">
-                          <a:solidFill>
-                            <a:srgbClr val="353B4A"/>
-                          </a:solidFill>
-                          <a:latin typeface="Inter"/>
-                        </a:rPr>
-                        <a:t>IEEE-submitted, USD 500, can present online</a:t>
-                      </a:r>
-                    </a:p>
-                  </a:txBody>
-                  <a:tcPr marL="73152" marR="73152" marT="36576" marB="36576" anchor="ctr">
-                    <a:solidFill>
-                      <a:srgbClr val="FFFFFF"/>
-                    </a:solidFill>
-                  </a:tcPr>
-                </a:tc>
-              </a:tr>
-              <a:tr h="420624">
-                <a:tc>
-                  <a:txBody>
-                    <a:bodyPr wrap="square"/>
-                    <a:lstStyle/>
-                    <a:p>
-                      <a:r>
-                        <a:rPr sz="950" b="1" i="0">
-                          <a:solidFill>
-                            <a:srgbClr val="1B2A55"/>
-                          </a:solidFill>
-                          <a:latin typeface="Inter"/>
-                        </a:rPr>
-                        <a:t>5</a:t>
-                      </a:r>
-                    </a:p>
-                  </a:txBody>
-                  <a:tcPr marL="73152" marR="73152" marT="36576" marB="36576" anchor="ctr">
-                    <a:solidFill>
-                      <a:srgbClr val="F1F0F6"/>
-                    </a:solidFill>
-                  </a:tcPr>
-                </a:tc>
-                <a:tc>
-                  <a:txBody>
-                    <a:bodyPr wrap="square"/>
-                    <a:lstStyle/>
-                    <a:p>
-                      <a:r>
-                        <a:rPr sz="950" b="0" i="0">
-                          <a:solidFill>
-                            <a:srgbClr val="353B4A"/>
-                          </a:solidFill>
-                          <a:latin typeface="Inter"/>
-                        </a:rPr>
-                        <a:t>ICEDEG or DATA/SECRYPT</a:t>
-                      </a:r>
-                    </a:p>
-                  </a:txBody>
-                  <a:tcPr marL="73152" marR="73152" marT="36576" marB="36576" anchor="ctr">
-                    <a:solidFill>
-                      <a:srgbClr val="F1F0F6"/>
-                    </a:solidFill>
-                  </a:tcPr>
-                </a:tc>
-                <a:tc>
-                  <a:txBody>
-                    <a:bodyPr wrap="square"/>
-                    <a:lstStyle/>
-                    <a:p>
-                      <a:r>
-                        <a:rPr sz="950" b="0" i="0">
-                          <a:solidFill>
-                            <a:srgbClr val="353B4A"/>
-                          </a:solidFill>
-                          <a:latin typeface="Inter"/>
-                        </a:rPr>
-                        <a:t>Feb-Mar 2027</a:t>
-                      </a:r>
-                    </a:p>
-                  </a:txBody>
-                  <a:tcPr marL="73152" marR="73152" marT="36576" marB="36576" anchor="ctr">
-                    <a:solidFill>
-                      <a:srgbClr val="F1F0F6"/>
-                    </a:solidFill>
-                  </a:tcPr>
-                </a:tc>
-                <a:tc>
-                  <a:txBody>
-                    <a:bodyPr wrap="square"/>
-                    <a:lstStyle/>
-                    <a:p>
-                      <a:r>
-                        <a:rPr sz="950" b="0" i="0">
-                          <a:solidFill>
-                            <a:srgbClr val="353B4A"/>
-                          </a:solidFill>
-                          <a:latin typeface="Inter"/>
-                        </a:rPr>
-                        <a:t>Apr-May 2027</a:t>
-                      </a:r>
-                    </a:p>
-                  </a:txBody>
-                  <a:tcPr marL="73152" marR="73152" marT="36576" marB="36576" anchor="ctr">
-                    <a:solidFill>
-                      <a:srgbClr val="F1F0F6"/>
-                    </a:solidFill>
-                  </a:tcPr>
-                </a:tc>
-                <a:tc>
-                  <a:txBody>
-                    <a:bodyPr wrap="square"/>
-                    <a:lstStyle/>
-                    <a:p>
-                      <a:r>
-                        <a:rPr sz="950" b="0" i="0">
-                          <a:solidFill>
-                            <a:srgbClr val="353B4A"/>
-                          </a:solidFill>
-                          <a:latin typeface="Inter"/>
-                        </a:rPr>
-                        <a:t>Best audience; the highest cost</a:t>
-                      </a:r>
-                    </a:p>
-                  </a:txBody>
-                  <a:tcPr marL="73152" marR="73152" marT="36576" marB="36576" anchor="ctr">
-                    <a:solidFill>
-                      <a:srgbClr val="F1F0F6"/>
-                    </a:solidFill>
-                  </a:tcPr>
-                </a:tc>
-              </a:tr>
-            </a:tbl>
-          </a:graphicData>
-        </a:graphic>
-      </p:graphicFrame>
-      <p:sp>
-        <p:nvSpPr>
-          <p:cNvPr id="7" name="TextBox 6"/>
+      <p:sp>
+        <p:nvSpPr>
+          <p:cNvPr id="6" name="Rounded Rectangle 5"/>
+          <p:cNvSpPr/>
+          <p:nvPr/>
+        </p:nvSpPr>
+        <p:spPr>
+          <a:xfrm>
+            <a:off x="457200" y="1097280"/>
+            <a:ext cx="4023360" cy="2926080"/>
+          </a:xfrm>
+          <a:prstGeom prst="roundRect">
+            <a:avLst>
+              <a:gd name="adj" fmla="val 6000"/>
+            </a:avLst>
+          </a:prstGeom>
+          <a:solidFill>
+            <a:srgbClr val="FFFFFF"/>
+          </a:solidFill>
+          <a:ln w="25400">
+            <a:solidFill>
+              <a:srgbClr val="1B2A55"/>
+            </a:solidFill>
+          </a:ln>
+          <a:effectLst/>
+        </p:spPr>
+        <p:style>
+          <a:lnRef idx="1">
+            <a:schemeClr val="accent1"/>
+          </a:lnRef>
+          <a:fillRef idx="3">
+            <a:schemeClr val="accent1"/>
+          </a:fillRef>
+          <a:effectRef idx="2">
+            <a:schemeClr val="accent1"/>
+          </a:effectRef>
+          <a:fontRef idx="minor">
+            <a:schemeClr val="lt1"/>
+          </a:fontRef>
+        </p:style>
+        <p:txBody>
+          <a:bodyPr rtlCol="0" anchor="ctr"/>
+          <a:lstStyle/>
+          <a:p>
+            <a:pPr algn="ctr"/>
+          </a:p>
+        </p:txBody>
+      </p:sp>
+      <p:sp>
+        <p:nvSpPr>
+          <p:cNvPr id="7" name="Rounded Rectangle 6"/>
+          <p:cNvSpPr/>
+          <p:nvPr/>
+        </p:nvSpPr>
+        <p:spPr>
+          <a:xfrm>
+            <a:off x="640080" y="1225296"/>
+            <a:ext cx="1559052" cy="237744"/>
+          </a:xfrm>
+          <a:prstGeom prst="roundRect">
+            <a:avLst>
+              <a:gd name="adj" fmla="val 15000"/>
+            </a:avLst>
+          </a:prstGeom>
+          <a:solidFill>
+            <a:srgbClr val="D8DFF3"/>
+          </a:solidFill>
+          <a:ln>
+            <a:noFill/>
+          </a:ln>
+          <a:effectLst/>
+        </p:spPr>
+        <p:style>
+          <a:lnRef idx="1">
+            <a:schemeClr val="accent1"/>
+          </a:lnRef>
+          <a:fillRef idx="3">
+            <a:schemeClr val="accent1"/>
+          </a:fillRef>
+          <a:effectRef idx="2">
+            <a:schemeClr val="accent1"/>
+          </a:effectRef>
+          <a:fontRef idx="minor">
+            <a:schemeClr val="lt1"/>
+          </a:fontRef>
+        </p:style>
+        <p:txBody>
+          <a:bodyPr rtlCol="0" anchor="ctr" wrap="square" lIns="54864" rIns="54864" tIns="18288" bIns="18288"/>
+          <a:lstStyle/>
+          <a:p>
+            <a:pPr algn="ctr">
+              <a:spcAft>
+                <a:spcPts val="0"/>
+              </a:spcAft>
+            </a:pPr>
+            <a:r>
+              <a:rPr sz="1000" b="1" i="0">
+                <a:solidFill>
+                  <a:srgbClr val="1B2A55"/>
+                </a:solidFill>
+                <a:latin typeface="Inter"/>
+              </a:rPr>
+              <a:t>WHAT WE FOUND</a:t>
+            </a:r>
+          </a:p>
+        </p:txBody>
+      </p:sp>
+      <p:sp>
+        <p:nvSpPr>
+          <p:cNvPr id="8" name="TextBox 7"/>
           <p:cNvSpPr txBox="1"/>
           <p:nvPr/>
         </p:nvSpPr>
         <p:spPr>
           <a:xfrm>
-            <a:off x="457200" y="4114800"/>
-            <a:ext cx="8229600" cy="685800"/>
+            <a:off x="640080" y="1600200"/>
+            <a:ext cx="3657600" cy="2377440"/>
           </a:xfrm>
           <a:prstGeom prst="rect">
             <a:avLst/>
@@ -43905,7 +42887,7 @@
           <a:p>
             <a:pPr algn="l">
               <a:spcAft>
-                <a:spcPts val="0"/>
+                <a:spcPts val="500"/>
               </a:spcAft>
             </a:pPr>
             <a:r>
@@ -43915,7 +42897,16 @@
                 </a:solidFill>
                 <a:latin typeface="Inter"/>
               </a:rPr>
-              <a:t>Before submitting: </a:t>
+              <a:t>•  </a:t>
+            </a:r>
+            <a:r>
+              <a:rPr sz="1050" b="1" i="0">
+                <a:solidFill>
+                  <a:srgbClr val="1B2A55"/>
+                </a:solidFill>
+                <a:latin typeface="Inter"/>
+              </a:rPr>
+              <a:t>VIT:</a:t>
             </a:r>
             <a:r>
               <a:rPr sz="1050" b="0" i="0">
@@ -43924,7 +42915,333 @@
                 </a:solidFill>
                 <a:latin typeface="Inter"/>
               </a:rPr>
-              <a:t>check the publisher's page, remove author names where double-blind, follow each venue's AI-disclosure rule, and recheck the deadline. Journals cost USD 2,000 to 3,000 in fees: only as a later extended version.</a:t>
+              <a:t> the public Research Promotion Policy (2019) supports conference fees for faculty only, up to INR 20,000 a year in India. The student schemes (Raman Research Award, TRA fellowships) do not cover conference fees.</a:t>
+            </a:r>
+          </a:p>
+          <a:p>
+            <a:pPr algn="l">
+              <a:spcAft>
+                <a:spcPts val="500"/>
+              </a:spcAft>
+            </a:pPr>
+            <a:r>
+              <a:rPr sz="1050" b="1" i="0">
+                <a:solidFill>
+                  <a:srgbClr val="1B2A55"/>
+                </a:solidFill>
+                <a:latin typeface="Inter"/>
+              </a:rPr>
+              <a:t>•  </a:t>
+            </a:r>
+            <a:r>
+              <a:rPr sz="1050" b="1" i="0">
+                <a:solidFill>
+                  <a:srgbClr val="1B2A55"/>
+                </a:solidFill>
+                <a:latin typeface="Inter"/>
+              </a:rPr>
+              <a:t>Organisers:</a:t>
+            </a:r>
+            <a:r>
+              <a:rPr sz="1050" b="0" i="0">
+                <a:solidFill>
+                  <a:srgbClr val="353B4A"/>
+                </a:solidFill>
+                <a:latin typeface="Inter"/>
+              </a:rPr>
+              <a:t> none publish a student waiver. Confluence, INDIACom and ICICC say fees are non-refundable.</a:t>
+            </a:r>
+          </a:p>
+        </p:txBody>
+      </p:sp>
+      <p:sp>
+        <p:nvSpPr>
+          <p:cNvPr id="9" name="Rounded Rectangle 8"/>
+          <p:cNvSpPr/>
+          <p:nvPr/>
+        </p:nvSpPr>
+        <p:spPr>
+          <a:xfrm>
+            <a:off x="4663440" y="1097280"/>
+            <a:ext cx="4023360" cy="2926080"/>
+          </a:xfrm>
+          <a:prstGeom prst="roundRect">
+            <a:avLst>
+              <a:gd name="adj" fmla="val 6000"/>
+            </a:avLst>
+          </a:prstGeom>
+          <a:solidFill>
+            <a:srgbClr val="FFFFFF"/>
+          </a:solidFill>
+          <a:ln w="25400">
+            <a:solidFill>
+              <a:srgbClr val="1B2A55"/>
+            </a:solidFill>
+          </a:ln>
+          <a:effectLst/>
+        </p:spPr>
+        <p:style>
+          <a:lnRef idx="1">
+            <a:schemeClr val="accent1"/>
+          </a:lnRef>
+          <a:fillRef idx="3">
+            <a:schemeClr val="accent1"/>
+          </a:fillRef>
+          <a:effectRef idx="2">
+            <a:schemeClr val="accent1"/>
+          </a:effectRef>
+          <a:fontRef idx="minor">
+            <a:schemeClr val="lt1"/>
+          </a:fontRef>
+        </p:style>
+        <p:txBody>
+          <a:bodyPr rtlCol="0" anchor="ctr"/>
+          <a:lstStyle/>
+          <a:p>
+            <a:pPr algn="ctr"/>
+          </a:p>
+        </p:txBody>
+      </p:sp>
+      <p:sp>
+        <p:nvSpPr>
+          <p:cNvPr id="10" name="Rounded Rectangle 9"/>
+          <p:cNvSpPr/>
+          <p:nvPr/>
+        </p:nvSpPr>
+        <p:spPr>
+          <a:xfrm>
+            <a:off x="4846320" y="1225296"/>
+            <a:ext cx="2615184" cy="237744"/>
+          </a:xfrm>
+          <a:prstGeom prst="roundRect">
+            <a:avLst>
+              <a:gd name="adj" fmla="val 15000"/>
+            </a:avLst>
+          </a:prstGeom>
+          <a:solidFill>
+            <a:srgbClr val="D8DFF3"/>
+          </a:solidFill>
+          <a:ln>
+            <a:noFill/>
+          </a:ln>
+          <a:effectLst/>
+        </p:spPr>
+        <p:style>
+          <a:lnRef idx="1">
+            <a:schemeClr val="accent1"/>
+          </a:lnRef>
+          <a:fillRef idx="3">
+            <a:schemeClr val="accent1"/>
+          </a:fillRef>
+          <a:effectRef idx="2">
+            <a:schemeClr val="accent1"/>
+          </a:effectRef>
+          <a:fontRef idx="minor">
+            <a:schemeClr val="lt1"/>
+          </a:fontRef>
+        </p:style>
+        <p:txBody>
+          <a:bodyPr rtlCol="0" anchor="ctr" wrap="square" lIns="54864" rIns="54864" tIns="18288" bIns="18288"/>
+          <a:lstStyle/>
+          <a:p>
+            <a:pPr algn="ctr">
+              <a:spcAft>
+                <a:spcPts val="0"/>
+              </a:spcAft>
+            </a:pPr>
+            <a:r>
+              <a:rPr sz="1000" b="1" i="0">
+                <a:solidFill>
+                  <a:srgbClr val="1B2A55"/>
+                </a:solidFill>
+                <a:latin typeface="Inter"/>
+              </a:rPr>
+              <a:t>WHAT TO DO BEFORE PAYING</a:t>
+            </a:r>
+          </a:p>
+        </p:txBody>
+      </p:sp>
+      <p:sp>
+        <p:nvSpPr>
+          <p:cNvPr id="11" name="TextBox 10"/>
+          <p:cNvSpPr txBox="1"/>
+          <p:nvPr/>
+        </p:nvSpPr>
+        <p:spPr>
+          <a:xfrm>
+            <a:off x="4846320" y="1600200"/>
+            <a:ext cx="3657600" cy="2377440"/>
+          </a:xfrm>
+          <a:prstGeom prst="rect">
+            <a:avLst/>
+          </a:prstGeom>
+          <a:noFill/>
+        </p:spPr>
+        <p:txBody>
+          <a:bodyPr wrap="square" anchor="t" lIns="0" rIns="0" tIns="0" bIns="0">
+            <a:spAutoFit/>
+          </a:bodyPr>
+          <a:lstStyle/>
+          <a:p>
+            <a:pPr algn="l">
+              <a:spcAft>
+                <a:spcPts val="500"/>
+              </a:spcAft>
+            </a:pPr>
+            <a:r>
+              <a:rPr sz="1050" b="1" i="0">
+                <a:solidFill>
+                  <a:srgbClr val="1B2A55"/>
+                </a:solidFill>
+                <a:latin typeface="Inter"/>
+              </a:rPr>
+              <a:t>•  </a:t>
+            </a:r>
+            <a:r>
+              <a:rPr sz="1050" b="0" i="0">
+                <a:solidFill>
+                  <a:srgbClr val="353B4A"/>
+                </a:solidFill>
+                <a:latin typeface="Inter"/>
+              </a:rPr>
+              <a:t>Ask the School Dean or Programme Chair, the Office of Academic Research and Student Welfare whether an undergraduate scheme exists, and get the answer in writing.</a:t>
+            </a:r>
+          </a:p>
+          <a:p>
+            <a:pPr algn="l">
+              <a:spcAft>
+                <a:spcPts val="500"/>
+              </a:spcAft>
+            </a:pPr>
+            <a:r>
+              <a:rPr sz="1050" b="1" i="0">
+                <a:solidFill>
+                  <a:srgbClr val="1B2A55"/>
+                </a:solidFill>
+                <a:latin typeface="Inter"/>
+              </a:rPr>
+              <a:t>•  </a:t>
+            </a:r>
+            <a:r>
+              <a:rPr sz="1050" b="0" i="0">
+                <a:solidFill>
+                  <a:srgbClr val="353B4A"/>
+                </a:solidFill>
+                <a:latin typeface="Inter"/>
+              </a:rPr>
+              <a:t>Ask whether VIT credit needs IEEE Xplore indexing, before picking a venue.</a:t>
+            </a:r>
+          </a:p>
+          <a:p>
+            <a:pPr algn="l">
+              <a:spcAft>
+                <a:spcPts val="500"/>
+              </a:spcAft>
+            </a:pPr>
+            <a:r>
+              <a:rPr sz="1050" b="1" i="0">
+                <a:solidFill>
+                  <a:srgbClr val="1B2A55"/>
+                </a:solidFill>
+                <a:latin typeface="Inter"/>
+              </a:rPr>
+              <a:t>•  </a:t>
+            </a:r>
+            <a:r>
+              <a:rPr sz="1050" b="0" i="0">
+                <a:solidFill>
+                  <a:srgbClr val="353B4A"/>
+                </a:solidFill>
+                <a:latin typeface="Inter"/>
+              </a:rPr>
+              <a:t>Until then, budget the fee as our own cost: about INR 5,900 to 9,440 for the cheaper venues.</a:t>
+            </a:r>
+          </a:p>
+        </p:txBody>
+      </p:sp>
+      <p:sp>
+        <p:nvSpPr>
+          <p:cNvPr id="12" name="Rounded Rectangle 11"/>
+          <p:cNvSpPr/>
+          <p:nvPr/>
+        </p:nvSpPr>
+        <p:spPr>
+          <a:xfrm>
+            <a:off x="457200" y="4160520"/>
+            <a:ext cx="8229600" cy="502920"/>
+          </a:xfrm>
+          <a:prstGeom prst="roundRect">
+            <a:avLst>
+              <a:gd name="adj" fmla="val 6000"/>
+            </a:avLst>
+          </a:prstGeom>
+          <a:solidFill>
+            <a:srgbClr val="F1F0F6"/>
+          </a:solidFill>
+          <a:ln w="25400">
+            <a:solidFill>
+              <a:srgbClr val="1B2A55"/>
+            </a:solidFill>
+          </a:ln>
+          <a:effectLst/>
+        </p:spPr>
+        <p:style>
+          <a:lnRef idx="1">
+            <a:schemeClr val="accent1"/>
+          </a:lnRef>
+          <a:fillRef idx="3">
+            <a:schemeClr val="accent1"/>
+          </a:fillRef>
+          <a:effectRef idx="2">
+            <a:schemeClr val="accent1"/>
+          </a:effectRef>
+          <a:fontRef idx="minor">
+            <a:schemeClr val="lt1"/>
+          </a:fontRef>
+        </p:style>
+        <p:txBody>
+          <a:bodyPr rtlCol="0" anchor="ctr"/>
+          <a:lstStyle/>
+          <a:p>
+            <a:pPr algn="ctr"/>
+          </a:p>
+        </p:txBody>
+      </p:sp>
+      <p:sp>
+        <p:nvSpPr>
+          <p:cNvPr id="13" name="TextBox 12"/>
+          <p:cNvSpPr txBox="1"/>
+          <p:nvPr/>
+        </p:nvSpPr>
+        <p:spPr>
+          <a:xfrm>
+            <a:off x="640080" y="4206240"/>
+            <a:ext cx="7863840" cy="411480"/>
+          </a:xfrm>
+          <a:prstGeom prst="rect">
+            <a:avLst/>
+          </a:prstGeom>
+          <a:noFill/>
+        </p:spPr>
+        <p:txBody>
+          <a:bodyPr wrap="square" anchor="ctr" lIns="0" rIns="0" tIns="0" bIns="0">
+            <a:spAutoFit/>
+          </a:bodyPr>
+          <a:lstStyle/>
+          <a:p>
+            <a:pPr algn="l">
+              <a:spcAft>
+                <a:spcPts val="0"/>
+              </a:spcAft>
+            </a:pPr>
+            <a:r>
+              <a:rPr sz="1050" b="1" i="0">
+                <a:solidFill>
+                  <a:srgbClr val="1B2A55"/>
+                </a:solidFill>
+                <a:latin typeface="Inter"/>
+              </a:rPr>
+              <a:t>The policy we read is from 2019; a newer or unpublished scheme may exist. We have not found one, and we are not assuming one.</a:t>
             </a:r>
           </a:p>
         </p:txBody>
@@ -44025,7 +43342,7 @@
                 </a:solidFill>
                 <a:latin typeface="Inter"/>
               </a:rPr>
-              <a:t>ROOMMATE LIST: REALITY CHECK</a:t>
+              <a:t>RECOMMENDED SUBMISSION ORDER</a:t>
             </a:r>
           </a:p>
         </p:txBody>
@@ -44064,7 +43381,7 @@
                 </a:solidFill>
                 <a:latin typeface="Inter"/>
               </a:rPr>
-              <a:t>The venues are real; "easy" is not supported</a:t>
+              <a:t>One venue at a time: dual submission is not allowed</a:t>
             </a:r>
           </a:p>
         </p:txBody>
@@ -44108,123 +43425,717 @@
           </a:p>
         </p:txBody>
       </p:sp>
-      <p:sp>
-        <p:nvSpPr>
-          <p:cNvPr id="6" name="Rounded Rectangle 5"/>
-          <p:cNvSpPr/>
-          <p:nvPr/>
-        </p:nvSpPr>
-        <p:spPr>
-          <a:xfrm>
-            <a:off x="457200" y="1097280"/>
-            <a:ext cx="4023360" cy="3474720"/>
-          </a:xfrm>
-          <a:prstGeom prst="roundRect">
-            <a:avLst>
-              <a:gd name="adj" fmla="val 6000"/>
-            </a:avLst>
-          </a:prstGeom>
-          <a:solidFill>
-            <a:srgbClr val="FFFFFF"/>
-          </a:solidFill>
-          <a:ln w="25400">
-            <a:solidFill>
-              <a:srgbClr val="1B2A55"/>
-            </a:solidFill>
-          </a:ln>
-          <a:effectLst/>
-        </p:spPr>
-        <p:style>
-          <a:lnRef idx="1">
-            <a:schemeClr val="accent1"/>
-          </a:lnRef>
-          <a:fillRef idx="3">
-            <a:schemeClr val="accent1"/>
-          </a:fillRef>
-          <a:effectRef idx="2">
-            <a:schemeClr val="accent1"/>
-          </a:effectRef>
-          <a:fontRef idx="minor">
-            <a:schemeClr val="lt1"/>
-          </a:fontRef>
-        </p:style>
-        <p:txBody>
-          <a:bodyPr rtlCol="0" anchor="ctr"/>
-          <a:lstStyle/>
-          <a:p>
-            <a:pPr algn="ctr"/>
-          </a:p>
-        </p:txBody>
-      </p:sp>
-      <p:sp>
-        <p:nvSpPr>
-          <p:cNvPr id="7" name="Rounded Rectangle 6"/>
-          <p:cNvSpPr/>
-          <p:nvPr/>
-        </p:nvSpPr>
-        <p:spPr>
-          <a:xfrm>
-            <a:off x="640080" y="1225296"/>
-            <a:ext cx="1078992" cy="237744"/>
-          </a:xfrm>
-          <a:prstGeom prst="roundRect">
-            <a:avLst>
-              <a:gd name="adj" fmla="val 15000"/>
-            </a:avLst>
-          </a:prstGeom>
-          <a:solidFill>
-            <a:srgbClr val="D8DFF3"/>
-          </a:solidFill>
-          <a:ln>
-            <a:noFill/>
-          </a:ln>
-          <a:effectLst/>
-        </p:spPr>
-        <p:style>
-          <a:lnRef idx="1">
-            <a:schemeClr val="accent1"/>
-          </a:lnRef>
-          <a:fillRef idx="3">
-            <a:schemeClr val="accent1"/>
-          </a:fillRef>
-          <a:effectRef idx="2">
-            <a:schemeClr val="accent1"/>
-          </a:effectRef>
-          <a:fontRef idx="minor">
-            <a:schemeClr val="lt1"/>
-          </a:fontRef>
-        </p:style>
-        <p:txBody>
-          <a:bodyPr rtlCol="0" anchor="ctr" wrap="square" lIns="54864" rIns="54864" tIns="18288" bIns="18288"/>
-          <a:lstStyle/>
-          <a:p>
-            <a:pPr algn="ctr">
-              <a:spcAft>
-                <a:spcPts val="0"/>
-              </a:spcAft>
-            </a:pPr>
-            <a:r>
-              <a:rPr sz="1000" b="1" i="0">
-                <a:solidFill>
-                  <a:srgbClr val="1B2A55"/>
-                </a:solidFill>
-                <a:latin typeface="Inter"/>
-              </a:rPr>
-              <a:t>HOLDS UP</a:t>
-            </a:r>
-          </a:p>
-        </p:txBody>
-      </p:sp>
-      <p:sp>
-        <p:nvSpPr>
-          <p:cNvPr id="8" name="TextBox 7"/>
+      <p:graphicFrame>
+        <p:nvGraphicFramePr>
+          <p:cNvPr id="6" name="Table 5"/>
+          <p:cNvGraphicFramePr>
+            <a:graphicFrameLocks noGrp="1"/>
+          </p:cNvGraphicFramePr>
+          <p:nvPr/>
+        </p:nvGraphicFramePr>
+        <p:xfrm>
+          <a:off x="457200" y="1097280"/>
+          <a:ext cx="8229599" cy="2651760"/>
+        </p:xfrm>
+        <a:graphic>
+          <a:graphicData uri="http://schemas.openxmlformats.org/drawingml/2006/table">
+            <a:tbl>
+              <a:tblPr firstRow="1" bandRow="1">
+                <a:tableStyleId>{5C22544A-7EE6-4342-B048-85BDC9FD1C3A}</a:tableStyleId>
+              </a:tblPr>
+              <a:tblGrid>
+                <a:gridCol w="548640"/>
+                <a:gridCol w="1737359"/>
+                <a:gridCol w="1920240"/>
+                <a:gridCol w="1097280"/>
+                <a:gridCol w="2926080"/>
+              </a:tblGrid>
+              <a:tr h="365760">
+                <a:tc>
+                  <a:txBody>
+                    <a:bodyPr wrap="square"/>
+                    <a:lstStyle/>
+                    <a:p>
+                      <a:r>
+                        <a:rPr sz="1000" b="1" i="0">
+                          <a:solidFill>
+                            <a:srgbClr val="FFFFFF"/>
+                          </a:solidFill>
+                          <a:latin typeface="Inter"/>
+                        </a:rPr>
+                        <a:t>Step</a:t>
+                      </a:r>
+                    </a:p>
+                  </a:txBody>
+                  <a:tcPr marL="73152" marR="73152" marT="36576" marB="36576" anchor="ctr">
+                    <a:solidFill>
+                      <a:srgbClr val="1B2A55"/>
+                    </a:solidFill>
+                  </a:tcPr>
+                </a:tc>
+                <a:tc>
+                  <a:txBody>
+                    <a:bodyPr wrap="square"/>
+                    <a:lstStyle/>
+                    <a:p>
+                      <a:r>
+                        <a:rPr sz="1000" b="1" i="0">
+                          <a:solidFill>
+                            <a:srgbClr val="FFFFFF"/>
+                          </a:solidFill>
+                          <a:latin typeface="Inter"/>
+                        </a:rPr>
+                        <a:t>Venue</a:t>
+                      </a:r>
+                    </a:p>
+                  </a:txBody>
+                  <a:tcPr marL="73152" marR="73152" marT="36576" marB="36576" anchor="ctr">
+                    <a:solidFill>
+                      <a:srgbClr val="1B2A55"/>
+                    </a:solidFill>
+                  </a:tcPr>
+                </a:tc>
+                <a:tc>
+                  <a:txBody>
+                    <a:bodyPr wrap="square"/>
+                    <a:lstStyle/>
+                    <a:p>
+                      <a:r>
+                        <a:rPr sz="1000" b="1" i="0">
+                          <a:solidFill>
+                            <a:srgbClr val="FFFFFF"/>
+                          </a:solidFill>
+                          <a:latin typeface="Inter"/>
+                        </a:rPr>
+                        <a:t>Host university</a:t>
+                      </a:r>
+                    </a:p>
+                  </a:txBody>
+                  <a:tcPr marL="73152" marR="73152" marT="36576" marB="36576" anchor="ctr">
+                    <a:solidFill>
+                      <a:srgbClr val="1B2A55"/>
+                    </a:solidFill>
+                  </a:tcPr>
+                </a:tc>
+                <a:tc>
+                  <a:txBody>
+                    <a:bodyPr wrap="square"/>
+                    <a:lstStyle/>
+                    <a:p>
+                      <a:r>
+                        <a:rPr sz="1000" b="1" i="0">
+                          <a:solidFill>
+                            <a:srgbClr val="FFFFFF"/>
+                          </a:solidFill>
+                          <a:latin typeface="Inter"/>
+                        </a:rPr>
+                        <a:t>Submit by</a:t>
+                      </a:r>
+                    </a:p>
+                  </a:txBody>
+                  <a:tcPr marL="73152" marR="73152" marT="36576" marB="36576" anchor="ctr">
+                    <a:solidFill>
+                      <a:srgbClr val="1B2A55"/>
+                    </a:solidFill>
+                  </a:tcPr>
+                </a:tc>
+                <a:tc>
+                  <a:txBody>
+                    <a:bodyPr wrap="square"/>
+                    <a:lstStyle/>
+                    <a:p>
+                      <a:r>
+                        <a:rPr sz="1000" b="1" i="0">
+                          <a:solidFill>
+                            <a:srgbClr val="FFFFFF"/>
+                          </a:solidFill>
+                          <a:latin typeface="Inter"/>
+                        </a:rPr>
+                        <a:t>Why this order</a:t>
+                      </a:r>
+                    </a:p>
+                  </a:txBody>
+                  <a:tcPr marL="73152" marR="73152" marT="36576" marB="36576" anchor="ctr">
+                    <a:solidFill>
+                      <a:srgbClr val="1B2A55"/>
+                    </a:solidFill>
+                  </a:tcPr>
+                </a:tc>
+              </a:tr>
+              <a:tr h="457200">
+                <a:tc>
+                  <a:txBody>
+                    <a:bodyPr wrap="square"/>
+                    <a:lstStyle/>
+                    <a:p>
+                      <a:r>
+                        <a:rPr sz="950" b="1" i="0">
+                          <a:solidFill>
+                            <a:srgbClr val="1B2A55"/>
+                          </a:solidFill>
+                          <a:latin typeface="Inter"/>
+                        </a:rPr>
+                        <a:t>1</a:t>
+                      </a:r>
+                    </a:p>
+                  </a:txBody>
+                  <a:tcPr marL="73152" marR="73152" marT="36576" marB="36576" anchor="ctr">
+                    <a:solidFill>
+                      <a:srgbClr val="FFFFFF"/>
+                    </a:solidFill>
+                  </a:tcPr>
+                </a:tc>
+                <a:tc>
+                  <a:txBody>
+                    <a:bodyPr wrap="square"/>
+                    <a:lstStyle/>
+                    <a:p>
+                      <a:r>
+                        <a:rPr sz="950" b="0" i="0">
+                          <a:solidFill>
+                            <a:srgbClr val="353B4A"/>
+                          </a:solidFill>
+                          <a:latin typeface="Inter"/>
+                        </a:rPr>
+                        <a:t>IEEE SANKALP 2027</a:t>
+                      </a:r>
+                    </a:p>
+                  </a:txBody>
+                  <a:tcPr marL="73152" marR="73152" marT="36576" marB="36576" anchor="ctr">
+                    <a:solidFill>
+                      <a:srgbClr val="FFFFFF"/>
+                    </a:solidFill>
+                  </a:tcPr>
+                </a:tc>
+                <a:tc>
+                  <a:txBody>
+                    <a:bodyPr wrap="square"/>
+                    <a:lstStyle/>
+                    <a:p>
+                      <a:r>
+                        <a:rPr sz="950" b="0" i="0">
+                          <a:solidFill>
+                            <a:srgbClr val="353B4A"/>
+                          </a:solidFill>
+                          <a:latin typeface="Inter"/>
+                        </a:rPr>
+                        <a:t>ABV-IIITM Gwalior</a:t>
+                      </a:r>
+                    </a:p>
+                  </a:txBody>
+                  <a:tcPr marL="73152" marR="73152" marT="36576" marB="36576" anchor="ctr">
+                    <a:solidFill>
+                      <a:srgbClr val="FFFFFF"/>
+                    </a:solidFill>
+                  </a:tcPr>
+                </a:tc>
+                <a:tc>
+                  <a:txBody>
+                    <a:bodyPr wrap="square"/>
+                    <a:lstStyle/>
+                    <a:p>
+                      <a:r>
+                        <a:rPr sz="950" b="0" i="0">
+                          <a:solidFill>
+                            <a:srgbClr val="353B4A"/>
+                          </a:solidFill>
+                          <a:latin typeface="Inter"/>
+                        </a:rPr>
+                        <a:t>30 Nov 2026</a:t>
+                      </a:r>
+                    </a:p>
+                  </a:txBody>
+                  <a:tcPr marL="73152" marR="73152" marT="36576" marB="36576" anchor="ctr">
+                    <a:solidFill>
+                      <a:srgbClr val="FFFFFF"/>
+                    </a:solidFill>
+                  </a:tcPr>
+                </a:tc>
+                <a:tc>
+                  <a:txBody>
+                    <a:bodyPr wrap="square"/>
+                    <a:lstStyle/>
+                    <a:p>
+                      <a:r>
+                        <a:rPr sz="950" b="0" i="0">
+                          <a:solidFill>
+                            <a:srgbClr val="353B4A"/>
+                          </a:solidFill>
+                          <a:latin typeface="Inter"/>
+                        </a:rPr>
+                        <a:t>IEEE record number shown; security and distributed-database tracks; INR 7,000</a:t>
+                      </a:r>
+                    </a:p>
+                  </a:txBody>
+                  <a:tcPr marL="73152" marR="73152" marT="36576" marB="36576" anchor="ctr">
+                    <a:solidFill>
+                      <a:srgbClr val="FFFFFF"/>
+                    </a:solidFill>
+                  </a:tcPr>
+                </a:tc>
+              </a:tr>
+              <a:tr h="457200">
+                <a:tc>
+                  <a:txBody>
+                    <a:bodyPr wrap="square"/>
+                    <a:lstStyle/>
+                    <a:p>
+                      <a:r>
+                        <a:rPr sz="950" b="1" i="0">
+                          <a:solidFill>
+                            <a:srgbClr val="1B2A55"/>
+                          </a:solidFill>
+                          <a:latin typeface="Inter"/>
+                        </a:rPr>
+                        <a:t>2</a:t>
+                      </a:r>
+                    </a:p>
+                  </a:txBody>
+                  <a:tcPr marL="73152" marR="73152" marT="36576" marB="36576" anchor="ctr">
+                    <a:solidFill>
+                      <a:srgbClr val="F1F0F6"/>
+                    </a:solidFill>
+                  </a:tcPr>
+                </a:tc>
+                <a:tc>
+                  <a:txBody>
+                    <a:bodyPr wrap="square"/>
+                    <a:lstStyle/>
+                    <a:p>
+                      <a:r>
+                        <a:rPr sz="950" b="0" i="0">
+                          <a:solidFill>
+                            <a:srgbClr val="353B4A"/>
+                          </a:solidFill>
+                          <a:latin typeface="Inter"/>
+                        </a:rPr>
+                        <a:t>Confluence 2027</a:t>
+                      </a:r>
+                    </a:p>
+                  </a:txBody>
+                  <a:tcPr marL="73152" marR="73152" marT="36576" marB="36576" anchor="ctr">
+                    <a:solidFill>
+                      <a:srgbClr val="F1F0F6"/>
+                    </a:solidFill>
+                  </a:tcPr>
+                </a:tc>
+                <a:tc>
+                  <a:txBody>
+                    <a:bodyPr wrap="square"/>
+                    <a:lstStyle/>
+                    <a:p>
+                      <a:r>
+                        <a:rPr sz="950" b="0" i="0">
+                          <a:solidFill>
+                            <a:srgbClr val="353B4A"/>
+                          </a:solidFill>
+                          <a:latin typeface="Inter"/>
+                        </a:rPr>
+                        <a:t>Amity University, Noida</a:t>
+                      </a:r>
+                    </a:p>
+                  </a:txBody>
+                  <a:tcPr marL="73152" marR="73152" marT="36576" marB="36576" anchor="ctr">
+                    <a:solidFill>
+                      <a:srgbClr val="F1F0F6"/>
+                    </a:solidFill>
+                  </a:tcPr>
+                </a:tc>
+                <a:tc>
+                  <a:txBody>
+                    <a:bodyPr wrap="square"/>
+                    <a:lstStyle/>
+                    <a:p>
+                      <a:r>
+                        <a:rPr sz="950" b="0" i="0">
+                          <a:solidFill>
+                            <a:srgbClr val="353B4A"/>
+                          </a:solidFill>
+                          <a:latin typeface="Inter"/>
+                        </a:rPr>
+                        <a:t>4 Dec 2026</a:t>
+                      </a:r>
+                    </a:p>
+                  </a:txBody>
+                  <a:tcPr marL="73152" marR="73152" marT="36576" marB="36576" anchor="ctr">
+                    <a:solidFill>
+                      <a:srgbClr val="F1F0F6"/>
+                    </a:solidFill>
+                  </a:tcPr>
+                </a:tc>
+                <a:tc>
+                  <a:txBody>
+                    <a:bodyPr wrap="square"/>
+                    <a:lstStyle/>
+                    <a:p>
+                      <a:r>
+                        <a:rPr sz="950" b="0" i="0">
+                          <a:solidFill>
+                            <a:srgbClr val="353B4A"/>
+                          </a:solidFill>
+                          <a:latin typeface="Inter"/>
+                        </a:rPr>
+                        <a:t>IEEE record number shown; INR 9,440; fast decision</a:t>
+                      </a:r>
+                    </a:p>
+                  </a:txBody>
+                  <a:tcPr marL="73152" marR="73152" marT="36576" marB="36576" anchor="ctr">
+                    <a:solidFill>
+                      <a:srgbClr val="F1F0F6"/>
+                    </a:solidFill>
+                  </a:tcPr>
+                </a:tc>
+              </a:tr>
+              <a:tr h="457200">
+                <a:tc>
+                  <a:txBody>
+                    <a:bodyPr wrap="square"/>
+                    <a:lstStyle/>
+                    <a:p>
+                      <a:r>
+                        <a:rPr sz="950" b="1" i="0">
+                          <a:solidFill>
+                            <a:srgbClr val="1B2A55"/>
+                          </a:solidFill>
+                          <a:latin typeface="Inter"/>
+                        </a:rPr>
+                        <a:t>3</a:t>
+                      </a:r>
+                    </a:p>
+                  </a:txBody>
+                  <a:tcPr marL="73152" marR="73152" marT="36576" marB="36576" anchor="ctr">
+                    <a:solidFill>
+                      <a:srgbClr val="FFFFFF"/>
+                    </a:solidFill>
+                  </a:tcPr>
+                </a:tc>
+                <a:tc>
+                  <a:txBody>
+                    <a:bodyPr wrap="square"/>
+                    <a:lstStyle/>
+                    <a:p>
+                      <a:r>
+                        <a:rPr sz="950" b="0" i="0">
+                          <a:solidFill>
+                            <a:srgbClr val="353B4A"/>
+                          </a:solidFill>
+                          <a:latin typeface="Inter"/>
+                        </a:rPr>
+                        <a:t>ICESICSC-2027</a:t>
+                      </a:r>
+                    </a:p>
+                  </a:txBody>
+                  <a:tcPr marL="73152" marR="73152" marT="36576" marB="36576" anchor="ctr">
+                    <a:solidFill>
+                      <a:srgbClr val="FFFFFF"/>
+                    </a:solidFill>
+                  </a:tcPr>
+                </a:tc>
+                <a:tc>
+                  <a:txBody>
+                    <a:bodyPr wrap="square"/>
+                    <a:lstStyle/>
+                    <a:p>
+                      <a:r>
+                        <a:rPr sz="950" b="0" i="0">
+                          <a:solidFill>
+                            <a:srgbClr val="353B4A"/>
+                          </a:solidFill>
+                          <a:latin typeface="Inter"/>
+                        </a:rPr>
+                        <a:t>KIIT, Bhubaneswar</a:t>
+                      </a:r>
+                    </a:p>
+                  </a:txBody>
+                  <a:tcPr marL="73152" marR="73152" marT="36576" marB="36576" anchor="ctr">
+                    <a:solidFill>
+                      <a:srgbClr val="FFFFFF"/>
+                    </a:solidFill>
+                  </a:tcPr>
+                </a:tc>
+                <a:tc>
+                  <a:txBody>
+                    <a:bodyPr wrap="square"/>
+                    <a:lstStyle/>
+                    <a:p>
+                      <a:r>
+                        <a:rPr sz="950" b="0" i="0">
+                          <a:solidFill>
+                            <a:srgbClr val="353B4A"/>
+                          </a:solidFill>
+                          <a:latin typeface="Inter"/>
+                        </a:rPr>
+                        <a:t>30 Oct 2026</a:t>
+                      </a:r>
+                    </a:p>
+                  </a:txBody>
+                  <a:tcPr marL="73152" marR="73152" marT="36576" marB="36576" anchor="ctr">
+                    <a:solidFill>
+                      <a:srgbClr val="FFFFFF"/>
+                    </a:solidFill>
+                  </a:tcPr>
+                </a:tc>
+                <a:tc>
+                  <a:txBody>
+                    <a:bodyPr wrap="square"/>
+                    <a:lstStyle/>
+                    <a:p>
+                      <a:r>
+                        <a:rPr sz="950" b="0" i="0">
+                          <a:solidFill>
+                            <a:srgbClr val="353B4A"/>
+                          </a:solidFill>
+                          <a:latin typeface="Inter"/>
+                        </a:rPr>
+                        <a:t>Closes in 7 days; only if the paper already fits their template</a:t>
+                      </a:r>
+                    </a:p>
+                  </a:txBody>
+                  <a:tcPr marL="73152" marR="73152" marT="36576" marB="36576" anchor="ctr">
+                    <a:solidFill>
+                      <a:srgbClr val="FFFFFF"/>
+                    </a:solidFill>
+                  </a:tcPr>
+                </a:tc>
+              </a:tr>
+              <a:tr h="457200">
+                <a:tc>
+                  <a:txBody>
+                    <a:bodyPr wrap="square"/>
+                    <a:lstStyle/>
+                    <a:p>
+                      <a:r>
+                        <a:rPr sz="950" b="1" i="0">
+                          <a:solidFill>
+                            <a:srgbClr val="1B2A55"/>
+                          </a:solidFill>
+                          <a:latin typeface="Inter"/>
+                        </a:rPr>
+                        <a:t>4</a:t>
+                      </a:r>
+                    </a:p>
+                  </a:txBody>
+                  <a:tcPr marL="73152" marR="73152" marT="36576" marB="36576" anchor="ctr">
+                    <a:solidFill>
+                      <a:srgbClr val="F1F0F6"/>
+                    </a:solidFill>
+                  </a:tcPr>
+                </a:tc>
+                <a:tc>
+                  <a:txBody>
+                    <a:bodyPr wrap="square"/>
+                    <a:lstStyle/>
+                    <a:p>
+                      <a:r>
+                        <a:rPr sz="950" b="0" i="0">
+                          <a:solidFill>
+                            <a:srgbClr val="353B4A"/>
+                          </a:solidFill>
+                          <a:latin typeface="Inter"/>
+                        </a:rPr>
+                        <a:t>INDIACom-2027</a:t>
+                      </a:r>
+                    </a:p>
+                  </a:txBody>
+                  <a:tcPr marL="73152" marR="73152" marT="36576" marB="36576" anchor="ctr">
+                    <a:solidFill>
+                      <a:srgbClr val="F1F0F6"/>
+                    </a:solidFill>
+                  </a:tcPr>
+                </a:tc>
+                <a:tc>
+                  <a:txBody>
+                    <a:bodyPr wrap="square"/>
+                    <a:lstStyle/>
+                    <a:p>
+                      <a:r>
+                        <a:rPr sz="950" b="0" i="0">
+                          <a:solidFill>
+                            <a:srgbClr val="353B4A"/>
+                          </a:solidFill>
+                          <a:latin typeface="Inter"/>
+                        </a:rPr>
+                        <a:t>BVICAM, Bharati Vidyapeeth</a:t>
+                      </a:r>
+                    </a:p>
+                  </a:txBody>
+                  <a:tcPr marL="73152" marR="73152" marT="36576" marB="36576" anchor="ctr">
+                    <a:solidFill>
+                      <a:srgbClr val="F1F0F6"/>
+                    </a:solidFill>
+                  </a:tcPr>
+                </a:tc>
+                <a:tc>
+                  <a:txBody>
+                    <a:bodyPr wrap="square"/>
+                    <a:lstStyle/>
+                    <a:p>
+                      <a:r>
+                        <a:rPr sz="950" b="0" i="0">
+                          <a:solidFill>
+                            <a:srgbClr val="353B4A"/>
+                          </a:solidFill>
+                          <a:latin typeface="Inter"/>
+                        </a:rPr>
+                        <a:t>7 Dec 2026</a:t>
+                      </a:r>
+                    </a:p>
+                  </a:txBody>
+                  <a:tcPr marL="73152" marR="73152" marT="36576" marB="36576" anchor="ctr">
+                    <a:solidFill>
+                      <a:srgbClr val="F1F0F6"/>
+                    </a:solidFill>
+                  </a:tcPr>
+                </a:tc>
+                <a:tc>
+                  <a:txBody>
+                    <a:bodyPr wrap="square"/>
+                    <a:lstStyle/>
+                    <a:p>
+                      <a:r>
+                        <a:rPr sz="950" b="0" i="0">
+                          <a:solidFill>
+                            <a:srgbClr val="353B4A"/>
+                          </a:solidFill>
+                          <a:latin typeface="Inter"/>
+                        </a:rPr>
+                        <a:t>Borderline host: only the parent university is ranked</a:t>
+                      </a:r>
+                    </a:p>
+                  </a:txBody>
+                  <a:tcPr marL="73152" marR="73152" marT="36576" marB="36576" anchor="ctr">
+                    <a:solidFill>
+                      <a:srgbClr val="F1F0F6"/>
+                    </a:solidFill>
+                  </a:tcPr>
+                </a:tc>
+              </a:tr>
+              <a:tr h="457200">
+                <a:tc>
+                  <a:txBody>
+                    <a:bodyPr wrap="square"/>
+                    <a:lstStyle/>
+                    <a:p>
+                      <a:r>
+                        <a:rPr sz="950" b="1" i="0">
+                          <a:solidFill>
+                            <a:srgbClr val="1B2A55"/>
+                          </a:solidFill>
+                          <a:latin typeface="Inter"/>
+                        </a:rPr>
+                        <a:t>5</a:t>
+                      </a:r>
+                    </a:p>
+                  </a:txBody>
+                  <a:tcPr marL="73152" marR="73152" marT="36576" marB="36576" anchor="ctr">
+                    <a:solidFill>
+                      <a:srgbClr val="FFFFFF"/>
+                    </a:solidFill>
+                  </a:tcPr>
+                </a:tc>
+                <a:tc>
+                  <a:txBody>
+                    <a:bodyPr wrap="square"/>
+                    <a:lstStyle/>
+                    <a:p>
+                      <a:r>
+                        <a:rPr sz="950" b="0" i="0">
+                          <a:solidFill>
+                            <a:srgbClr val="353B4A"/>
+                          </a:solidFill>
+                          <a:latin typeface="Inter"/>
+                        </a:rPr>
+                        <a:t>i-PACT 2027</a:t>
+                      </a:r>
+                    </a:p>
+                  </a:txBody>
+                  <a:tcPr marL="73152" marR="73152" marT="36576" marB="36576" anchor="ctr">
+                    <a:solidFill>
+                      <a:srgbClr val="FFFFFF"/>
+                    </a:solidFill>
+                  </a:tcPr>
+                </a:tc>
+                <a:tc>
+                  <a:txBody>
+                    <a:bodyPr wrap="square"/>
+                    <a:lstStyle/>
+                    <a:p>
+                      <a:r>
+                        <a:rPr sz="950" b="0" i="0">
+                          <a:solidFill>
+                            <a:srgbClr val="353B4A"/>
+                          </a:solidFill>
+                          <a:latin typeface="Inter"/>
+                        </a:rPr>
+                        <a:t>VIT, Vellore</a:t>
+                      </a:r>
+                    </a:p>
+                  </a:txBody>
+                  <a:tcPr marL="73152" marR="73152" marT="36576" marB="36576" anchor="ctr">
+                    <a:solidFill>
+                      <a:srgbClr val="FFFFFF"/>
+                    </a:solidFill>
+                  </a:tcPr>
+                </a:tc>
+                <a:tc>
+                  <a:txBody>
+                    <a:bodyPr wrap="square"/>
+                    <a:lstStyle/>
+                    <a:p>
+                      <a:r>
+                        <a:rPr sz="950" b="0" i="0">
+                          <a:solidFill>
+                            <a:srgbClr val="353B4A"/>
+                          </a:solidFill>
+                          <a:latin typeface="Inter"/>
+                        </a:rPr>
+                        <a:t>31 May 2027</a:t>
+                      </a:r>
+                    </a:p>
+                  </a:txBody>
+                  <a:tcPr marL="73152" marR="73152" marT="36576" marB="36576" anchor="ctr">
+                    <a:solidFill>
+                      <a:srgbClr val="FFFFFF"/>
+                    </a:solidFill>
+                  </a:tcPr>
+                </a:tc>
+                <a:tc>
+                  <a:txBody>
+                    <a:bodyPr wrap="square"/>
+                    <a:lstStyle/>
+                    <a:p>
+                      <a:r>
+                        <a:rPr sz="950" b="0" i="0">
+                          <a:solidFill>
+                            <a:srgbClr val="353B4A"/>
+                          </a:solidFill>
+                          <a:latin typeface="Inter"/>
+                        </a:rPr>
+                        <a:t>Our own campus, but a power-engineering conference</a:t>
+                      </a:r>
+                    </a:p>
+                  </a:txBody>
+                  <a:tcPr marL="73152" marR="73152" marT="36576" marB="36576" anchor="ctr">
+                    <a:solidFill>
+                      <a:srgbClr val="FFFFFF"/>
+                    </a:solidFill>
+                  </a:tcPr>
+                </a:tc>
+              </a:tr>
+            </a:tbl>
+          </a:graphicData>
+        </a:graphic>
+      </p:graphicFrame>
+      <p:sp>
+        <p:nvSpPr>
+          <p:cNvPr id="7" name="TextBox 6"/>
           <p:cNvSpPr txBox="1"/>
           <p:nvPr/>
         </p:nvSpPr>
         <p:spPr>
           <a:xfrm>
-            <a:off x="640080" y="1600200"/>
-            <a:ext cx="3657600" cy="2926080"/>
+            <a:off x="457200" y="3840480"/>
+            <a:ext cx="8229600" cy="914400"/>
           </a:xfrm>
           <a:prstGeom prst="rect">
             <a:avLst/>
@@ -44239,7 +44150,7 @@
           <a:p>
             <a:pPr algn="l">
               <a:spcAft>
-                <a:spcPts val="500"/>
+                <a:spcPts val="0"/>
               </a:spcAft>
             </a:pPr>
             <a:r>
@@ -44249,16 +44160,7 @@
                 </a:solidFill>
                 <a:latin typeface="Inter"/>
               </a:rPr>
-              <a:t>•  </a:t>
-            </a:r>
-            <a:r>
-              <a:rPr sz="1050" b="1" i="0">
-                <a:solidFill>
-                  <a:srgbClr val="1B2A55"/>
-                </a:solidFill>
-                <a:latin typeface="Inter"/>
-              </a:rPr>
-              <a:t>ICRTAC:</a:t>
+              <a:t>Before submitting: </a:t>
             </a:r>
             <a:r>
               <a:rPr sz="1050" b="0" i="0">
@@ -44267,443 +44169,7 @@
                 </a:solidFill>
                 <a:latin typeface="Inter"/>
               </a:rPr>
-              <a:t> real, VIT Chennai SCOPE, 9th edition 10-11 Dec 2026, but closed: the page shows no late route.</a:t>
-            </a:r>
-          </a:p>
-          <a:p>
-            <a:pPr algn="l">
-              <a:spcAft>
-                <a:spcPts val="500"/>
-              </a:spcAft>
-            </a:pPr>
-            <a:r>
-              <a:rPr sz="1050" b="1" i="0">
-                <a:solidFill>
-                  <a:srgbClr val="1B2A55"/>
-                </a:solidFill>
-                <a:latin typeface="Inter"/>
-              </a:rPr>
-              <a:t>•  </a:t>
-            </a:r>
-            <a:r>
-              <a:rPr sz="1050" b="1" i="0">
-                <a:solidFill>
-                  <a:srgbClr val="1B2A55"/>
-                </a:solidFill>
-                <a:latin typeface="Inter"/>
-              </a:rPr>
-              <a:t>ICSCAN:</a:t>
-            </a:r>
-            <a:r>
-              <a:rPr sz="1050" b="0" i="0">
-                <a:solidFill>
-                  <a:srgbClr val="353B4A"/>
-                </a:solidFill>
-                <a:latin typeface="Inter"/>
-              </a:rPr>
-              <a:t> real; the 7th edition ran in June 2026.</a:t>
-            </a:r>
-          </a:p>
-          <a:p>
-            <a:pPr algn="l">
-              <a:spcAft>
-                <a:spcPts val="500"/>
-              </a:spcAft>
-            </a:pPr>
-            <a:r>
-              <a:rPr sz="1050" b="1" i="0">
-                <a:solidFill>
-                  <a:srgbClr val="1B2A55"/>
-                </a:solidFill>
-                <a:latin typeface="Inter"/>
-              </a:rPr>
-              <a:t>•  </a:t>
-            </a:r>
-            <a:r>
-              <a:rPr sz="1050" b="1" i="0">
-                <a:solidFill>
-                  <a:srgbClr val="1B2A55"/>
-                </a:solidFill>
-                <a:latin typeface="Inter"/>
-              </a:rPr>
-              <a:t>i-PACT:</a:t>
-            </a:r>
-            <a:r>
-              <a:rPr sz="1050" b="0" i="0">
-                <a:solidFill>
-                  <a:srgbClr val="353B4A"/>
-                </a:solidFill>
-                <a:latin typeface="Inter"/>
-              </a:rPr>
-              <a:t> real, at VIT Vellore in Sep 2027, but it is a power-engineering conference.</a:t>
-            </a:r>
-          </a:p>
-          <a:p>
-            <a:pPr algn="l">
-              <a:spcAft>
-                <a:spcPts val="500"/>
-              </a:spcAft>
-            </a:pPr>
-            <a:r>
-              <a:rPr sz="1050" b="1" i="0">
-                <a:solidFill>
-                  <a:srgbClr val="1B2A55"/>
-                </a:solidFill>
-                <a:latin typeface="Inter"/>
-              </a:rPr>
-              <a:t>•  </a:t>
-            </a:r>
-            <a:r>
-              <a:rPr sz="1050" b="1" i="0">
-                <a:solidFill>
-                  <a:srgbClr val="1B2A55"/>
-                </a:solidFill>
-                <a:latin typeface="Inter"/>
-              </a:rPr>
-              <a:t>E-Vote-ID:</a:t>
-            </a:r>
-            <a:r>
-              <a:rPr sz="1050" b="0" i="0">
-                <a:solidFill>
-                  <a:srgbClr val="353B4A"/>
-                </a:solidFill>
-                <a:latin typeface="Inter"/>
-              </a:rPr>
-              <a:t> real and the best topical fit.</a:t>
-            </a:r>
-          </a:p>
-          <a:p>
-            <a:pPr algn="l">
-              <a:spcAft>
-                <a:spcPts val="500"/>
-              </a:spcAft>
-            </a:pPr>
-            <a:r>
-              <a:rPr sz="1050" b="1" i="0">
-                <a:solidFill>
-                  <a:srgbClr val="1B2A55"/>
-                </a:solidFill>
-                <a:latin typeface="Inter"/>
-              </a:rPr>
-              <a:t>•  </a:t>
-            </a:r>
-            <a:r>
-              <a:rPr sz="1050" b="1" i="0">
-                <a:solidFill>
-                  <a:srgbClr val="1B2A55"/>
-                </a:solidFill>
-                <a:latin typeface="Inter"/>
-              </a:rPr>
-              <a:t>DASFAA / ICDE demo tracks:</a:t>
-            </a:r>
-            <a:r>
-              <a:rPr sz="1050" b="0" i="0">
-                <a:solidFill>
-                  <a:srgbClr val="353B4A"/>
-                </a:solidFill>
-                <a:latin typeface="Inter"/>
-              </a:rPr>
-              <a:t> exist, but are competitive.</a:t>
-            </a:r>
-          </a:p>
-        </p:txBody>
-      </p:sp>
-      <p:sp>
-        <p:nvSpPr>
-          <p:cNvPr id="9" name="Rounded Rectangle 8"/>
-          <p:cNvSpPr/>
-          <p:nvPr/>
-        </p:nvSpPr>
-        <p:spPr>
-          <a:xfrm>
-            <a:off x="4663440" y="1097280"/>
-            <a:ext cx="4023360" cy="3474720"/>
-          </a:xfrm>
-          <a:prstGeom prst="roundRect">
-            <a:avLst>
-              <a:gd name="adj" fmla="val 6000"/>
-            </a:avLst>
-          </a:prstGeom>
-          <a:solidFill>
-            <a:srgbClr val="FFFFFF"/>
-          </a:solidFill>
-          <a:ln w="25400">
-            <a:solidFill>
-              <a:srgbClr val="1B2A55"/>
-            </a:solidFill>
-          </a:ln>
-          <a:effectLst/>
-        </p:spPr>
-        <p:style>
-          <a:lnRef idx="1">
-            <a:schemeClr val="accent1"/>
-          </a:lnRef>
-          <a:fillRef idx="3">
-            <a:schemeClr val="accent1"/>
-          </a:fillRef>
-          <a:effectRef idx="2">
-            <a:schemeClr val="accent1"/>
-          </a:effectRef>
-          <a:fontRef idx="minor">
-            <a:schemeClr val="lt1"/>
-          </a:fontRef>
-        </p:style>
-        <p:txBody>
-          <a:bodyPr rtlCol="0" anchor="ctr"/>
-          <a:lstStyle/>
-          <a:p>
-            <a:pPr algn="ctr"/>
-          </a:p>
-        </p:txBody>
-      </p:sp>
-      <p:sp>
-        <p:nvSpPr>
-          <p:cNvPr id="10" name="Rounded Rectangle 9"/>
-          <p:cNvSpPr/>
-          <p:nvPr/>
-        </p:nvSpPr>
-        <p:spPr>
-          <a:xfrm>
-            <a:off x="4846320" y="1225296"/>
-            <a:ext cx="2423160" cy="237744"/>
-          </a:xfrm>
-          <a:prstGeom prst="roundRect">
-            <a:avLst>
-              <a:gd name="adj" fmla="val 15000"/>
-            </a:avLst>
-          </a:prstGeom>
-          <a:solidFill>
-            <a:srgbClr val="D8DFF3"/>
-          </a:solidFill>
-          <a:ln>
-            <a:noFill/>
-          </a:ln>
-          <a:effectLst/>
-        </p:spPr>
-        <p:style>
-          <a:lnRef idx="1">
-            <a:schemeClr val="accent1"/>
-          </a:lnRef>
-          <a:fillRef idx="3">
-            <a:schemeClr val="accent1"/>
-          </a:fillRef>
-          <a:effectRef idx="2">
-            <a:schemeClr val="accent1"/>
-          </a:effectRef>
-          <a:fontRef idx="minor">
-            <a:schemeClr val="lt1"/>
-          </a:fontRef>
-        </p:style>
-        <p:txBody>
-          <a:bodyPr rtlCol="0" anchor="ctr" wrap="square" lIns="54864" rIns="54864" tIns="18288" bIns="18288"/>
-          <a:lstStyle/>
-          <a:p>
-            <a:pPr algn="ctr">
-              <a:spcAft>
-                <a:spcPts val="0"/>
-              </a:spcAft>
-            </a:pPr>
-            <a:r>
-              <a:rPr sz="1000" b="1" i="0">
-                <a:solidFill>
-                  <a:srgbClr val="1B2A55"/>
-                </a:solidFill>
-                <a:latin typeface="Inter"/>
-              </a:rPr>
-              <a:t>COULD NOT BE SUPPORTED</a:t>
-            </a:r>
-          </a:p>
-        </p:txBody>
-      </p:sp>
-      <p:sp>
-        <p:nvSpPr>
-          <p:cNvPr id="11" name="TextBox 10"/>
-          <p:cNvSpPr txBox="1"/>
-          <p:nvPr/>
-        </p:nvSpPr>
-        <p:spPr>
-          <a:xfrm>
-            <a:off x="4846320" y="1600200"/>
-            <a:ext cx="3657600" cy="2926080"/>
-          </a:xfrm>
-          <a:prstGeom prst="rect">
-            <a:avLst/>
-          </a:prstGeom>
-          <a:noFill/>
-        </p:spPr>
-        <p:txBody>
-          <a:bodyPr wrap="square" anchor="t" lIns="0" rIns="0" tIns="0" bIns="0">
-            <a:spAutoFit/>
-          </a:bodyPr>
-          <a:lstStyle/>
-          <a:p>
-            <a:pPr algn="l">
-              <a:spcAft>
-                <a:spcPts val="500"/>
-              </a:spcAft>
-            </a:pPr>
-            <a:r>
-              <a:rPr sz="1050" b="1" i="0">
-                <a:solidFill>
-                  <a:srgbClr val="1B2A55"/>
-                </a:solidFill>
-                <a:latin typeface="Inter"/>
-              </a:rPr>
-              <a:t>•  </a:t>
-            </a:r>
-            <a:r>
-              <a:rPr sz="1050" b="1" i="0">
-                <a:solidFill>
-                  <a:srgbClr val="1B2A55"/>
-                </a:solidFill>
-                <a:latin typeface="Inter"/>
-              </a:rPr>
-              <a:t>"75% acceptance":</a:t>
-            </a:r>
-            <a:r>
-              <a:rPr sz="1050" b="0" i="0">
-                <a:solidFill>
-                  <a:srgbClr val="353B4A"/>
-                </a:solidFill>
-                <a:latin typeface="Inter"/>
-              </a:rPr>
-              <a:t> no venue publishes it; ICRTAC 2024 took 36 of 315 papers, about 11%.</a:t>
-            </a:r>
-          </a:p>
-          <a:p>
-            <a:pPr algn="l">
-              <a:spcAft>
-                <a:spcPts val="500"/>
-              </a:spcAft>
-            </a:pPr>
-            <a:r>
-              <a:rPr sz="1050" b="1" i="0">
-                <a:solidFill>
-                  <a:srgbClr val="1B2A55"/>
-                </a:solidFill>
-                <a:latin typeface="Inter"/>
-              </a:rPr>
-              <a:t>•  </a:t>
-            </a:r>
-            <a:r>
-              <a:rPr sz="1050" b="1" i="0">
-                <a:solidFill>
-                  <a:srgbClr val="1B2A55"/>
-                </a:solidFill>
-                <a:latin typeface="Inter"/>
-              </a:rPr>
-              <a:t>"Springer" for ICRTAC:</a:t>
-            </a:r>
-            <a:r>
-              <a:rPr sz="1050" b="0" i="0">
-                <a:solidFill>
-                  <a:srgbClr val="353B4A"/>
-                </a:solidFill>
-                <a:latin typeface="Inter"/>
-              </a:rPr>
-              <a:t> only the 2024 edition; 2026 says IEEE Xplore, subject to review.</a:t>
-            </a:r>
-          </a:p>
-          <a:p>
-            <a:pPr algn="l">
-              <a:spcAft>
-                <a:spcPts val="500"/>
-              </a:spcAft>
-            </a:pPr>
-            <a:r>
-              <a:rPr sz="1050" b="1" i="0">
-                <a:solidFill>
-                  <a:srgbClr val="1B2A55"/>
-                </a:solidFill>
-                <a:latin typeface="Inter"/>
-              </a:rPr>
-              <a:t>•  </a:t>
-            </a:r>
-            <a:r>
-              <a:rPr sz="1050" b="1" i="0">
-                <a:solidFill>
-                  <a:srgbClr val="1B2A55"/>
-                </a:solidFill>
-                <a:latin typeface="Inter"/>
-              </a:rPr>
-              <a:t>ICSCAN / ICCCNT "IEEE":</a:t>
-            </a:r>
-            <a:r>
-              <a:rPr sz="1050" b="0" i="0">
-                <a:solidFill>
-                  <a:srgbClr val="353B4A"/>
-                </a:solidFill>
-                <a:latin typeface="Inter"/>
-              </a:rPr>
-              <a:t> not confirmed on the official sites.</a:t>
-            </a:r>
-          </a:p>
-          <a:p>
-            <a:pPr algn="l">
-              <a:spcAft>
-                <a:spcPts val="500"/>
-              </a:spcAft>
-            </a:pPr>
-            <a:r>
-              <a:rPr sz="1050" b="1" i="0">
-                <a:solidFill>
-                  <a:srgbClr val="1B2A55"/>
-                </a:solidFill>
-                <a:latin typeface="Inter"/>
-              </a:rPr>
-              <a:t>•  </a:t>
-            </a:r>
-            <a:r>
-              <a:rPr sz="1050" b="1" i="0">
-                <a:solidFill>
-                  <a:srgbClr val="1B2A55"/>
-                </a:solidFill>
-                <a:latin typeface="Inter"/>
-              </a:rPr>
-              <a:t>ViTECoN:</a:t>
-            </a:r>
-            <a:r>
-              <a:rPr sz="1050" b="0" i="0">
-                <a:solidFill>
-                  <a:srgbClr val="353B4A"/>
-                </a:solidFill>
-                <a:latin typeface="Inter"/>
-              </a:rPr>
-              <a:t> no current call found.</a:t>
-            </a:r>
-          </a:p>
-          <a:p>
-            <a:pPr algn="l">
-              <a:spcAft>
-                <a:spcPts val="500"/>
-              </a:spcAft>
-            </a:pPr>
-            <a:r>
-              <a:rPr sz="1050" b="1" i="0">
-                <a:solidFill>
-                  <a:srgbClr val="1B2A55"/>
-                </a:solidFill>
-                <a:latin typeface="Inter"/>
-              </a:rPr>
-              <a:t>•  </a:t>
-            </a:r>
-            <a:r>
-              <a:rPr sz="1050" b="1" i="0">
-                <a:solidFill>
-                  <a:srgbClr val="1B2A55"/>
-                </a:solidFill>
-                <a:latin typeface="Inter"/>
-              </a:rPr>
-              <a:t>"Fast to accept":</a:t>
-            </a:r>
-            <a:r>
-              <a:rPr sz="1050" b="0" i="0">
-                <a:solidFill>
-                  <a:srgbClr val="353B4A"/>
-                </a:solidFill>
-                <a:latin typeface="Inter"/>
-              </a:rPr>
-              <a:t> very short reviews are a warning sign, not a feature.</a:t>
+              <a:t>check the IEEE site for each record number, recheck the deadline and the NIRF edition (a 2026 list may be published), remove author names where double-blind, and follow each venue's AI-disclosure rule. Journals cost USD 2,000 to 3,000 in fees: only as a later extended version.</a:t>
             </a:r>
           </a:p>
         </p:txBody>
